--- a/docs/plots/carbo/jx_carbo_adjcif_grade3.pptx
+++ b/docs/plots/carbo/jx_carbo_adjcif_grade3.pptx
@@ -2271,7 +2271,7 @@
           </p:nvSpPr>
           <p:spPr>
             <a:xfrm>
-              <a:off x="972874" y="5242383"/>
+              <a:off x="972874" y="5234939"/>
               <a:ext cx="7644336" cy="0"/>
             </a:xfrm>
             <a:custGeom>
@@ -2314,7 +2314,7 @@
           </p:nvSpPr>
           <p:spPr>
             <a:xfrm>
-              <a:off x="972874" y="4566305"/>
+              <a:off x="972874" y="4543975"/>
               <a:ext cx="7644336" cy="0"/>
             </a:xfrm>
             <a:custGeom>
@@ -2357,7 +2357,7 @@
           </p:nvSpPr>
           <p:spPr>
             <a:xfrm>
-              <a:off x="972874" y="3890227"/>
+              <a:off x="972874" y="3853010"/>
               <a:ext cx="7644336" cy="0"/>
             </a:xfrm>
             <a:custGeom>
@@ -2400,7 +2400,7 @@
           </p:nvSpPr>
           <p:spPr>
             <a:xfrm>
-              <a:off x="972874" y="3214149"/>
+              <a:off x="972874" y="3162046"/>
               <a:ext cx="7644336" cy="0"/>
             </a:xfrm>
             <a:custGeom>
@@ -2658,7 +2658,7 @@
           </p:nvSpPr>
           <p:spPr>
             <a:xfrm>
-              <a:off x="972874" y="4904344"/>
+              <a:off x="972874" y="4889457"/>
               <a:ext cx="7644336" cy="0"/>
             </a:xfrm>
             <a:custGeom>
@@ -2701,7 +2701,7 @@
           </p:nvSpPr>
           <p:spPr>
             <a:xfrm>
-              <a:off x="972874" y="4228266"/>
+              <a:off x="972874" y="4198493"/>
               <a:ext cx="7644336" cy="0"/>
             </a:xfrm>
             <a:custGeom>
@@ -2744,7 +2744,7 @@
           </p:nvSpPr>
           <p:spPr>
             <a:xfrm>
-              <a:off x="972874" y="3552188"/>
+              <a:off x="972874" y="3507528"/>
               <a:ext cx="7644336" cy="0"/>
             </a:xfrm>
             <a:custGeom>
@@ -2787,7 +2787,7 @@
           </p:nvSpPr>
           <p:spPr>
             <a:xfrm>
-              <a:off x="972874" y="2876111"/>
+              <a:off x="972874" y="2816563"/>
               <a:ext cx="7644336" cy="0"/>
             </a:xfrm>
             <a:custGeom>
@@ -3002,78 +3002,78 @@
           </p:nvSpPr>
           <p:spPr>
             <a:xfrm>
-              <a:off x="1320344" y="4437045"/>
-              <a:ext cx="6949396" cy="1075840"/>
+              <a:off x="1320344" y="4384373"/>
+              <a:ext cx="6949396" cy="1125402"/>
             </a:xfrm>
             <a:custGeom>
               <a:avLst/>
               <a:pathLst>
-                <a:path w="6949396" h="1075840">
+                <a:path w="6949396" h="1125402">
                   <a:moveTo>
-                    <a:pt x="0" y="1075840"/>
+                    <a:pt x="0" y="1125402"/>
                   </a:moveTo>
                   <a:lnTo>
-                    <a:pt x="185317" y="1075840"/>
-                  </a:lnTo>
-                  <a:lnTo>
-                    <a:pt x="185317" y="807934"/>
-                  </a:lnTo>
-                  <a:lnTo>
-                    <a:pt x="277975" y="807934"/>
-                  </a:lnTo>
-                  <a:lnTo>
-                    <a:pt x="277975" y="737288"/>
-                  </a:lnTo>
-                  <a:lnTo>
-                    <a:pt x="370634" y="737288"/>
-                  </a:lnTo>
-                  <a:lnTo>
-                    <a:pt x="370634" y="665382"/>
-                  </a:lnTo>
-                  <a:lnTo>
-                    <a:pt x="1482537" y="665382"/>
-                  </a:lnTo>
-                  <a:lnTo>
-                    <a:pt x="1482537" y="593234"/>
-                  </a:lnTo>
-                  <a:lnTo>
-                    <a:pt x="1945831" y="593234"/>
-                  </a:lnTo>
-                  <a:lnTo>
-                    <a:pt x="1945831" y="520231"/>
-                  </a:lnTo>
-                  <a:lnTo>
-                    <a:pt x="2223806" y="520231"/>
-                  </a:lnTo>
-                  <a:lnTo>
-                    <a:pt x="2223806" y="446857"/>
-                  </a:lnTo>
-                  <a:lnTo>
-                    <a:pt x="3057734" y="446857"/>
-                  </a:lnTo>
-                  <a:lnTo>
-                    <a:pt x="3057734" y="299863"/>
-                  </a:lnTo>
-                  <a:lnTo>
-                    <a:pt x="3335710" y="299863"/>
-                  </a:lnTo>
-                  <a:lnTo>
-                    <a:pt x="3335710" y="225558"/>
-                  </a:lnTo>
-                  <a:lnTo>
-                    <a:pt x="6300786" y="225558"/>
-                  </a:lnTo>
-                  <a:lnTo>
-                    <a:pt x="6300786" y="151640"/>
-                  </a:lnTo>
-                  <a:lnTo>
-                    <a:pt x="6578762" y="151640"/>
-                  </a:lnTo>
-                  <a:lnTo>
-                    <a:pt x="6578762" y="76313"/>
-                  </a:lnTo>
-                  <a:lnTo>
-                    <a:pt x="6949396" y="76313"/>
+                    <a:pt x="185317" y="1125402"/>
+                  </a:lnTo>
+                  <a:lnTo>
+                    <a:pt x="185317" y="845409"/>
+                  </a:lnTo>
+                  <a:lnTo>
+                    <a:pt x="277975" y="845409"/>
+                  </a:lnTo>
+                  <a:lnTo>
+                    <a:pt x="277975" y="771656"/>
+                  </a:lnTo>
+                  <a:lnTo>
+                    <a:pt x="370634" y="771656"/>
+                  </a:lnTo>
+                  <a:lnTo>
+                    <a:pt x="370634" y="696580"/>
+                  </a:lnTo>
+                  <a:lnTo>
+                    <a:pt x="1482537" y="696580"/>
+                  </a:lnTo>
+                  <a:lnTo>
+                    <a:pt x="1482537" y="620903"/>
+                  </a:lnTo>
+                  <a:lnTo>
+                    <a:pt x="1945831" y="620903"/>
+                  </a:lnTo>
+                  <a:lnTo>
+                    <a:pt x="1945831" y="544144"/>
+                  </a:lnTo>
+                  <a:lnTo>
+                    <a:pt x="2223806" y="544144"/>
+                  </a:lnTo>
+                  <a:lnTo>
+                    <a:pt x="2223806" y="467006"/>
+                  </a:lnTo>
+                  <a:lnTo>
+                    <a:pt x="3057734" y="467006"/>
+                  </a:lnTo>
+                  <a:lnTo>
+                    <a:pt x="3057734" y="312905"/>
+                  </a:lnTo>
+                  <a:lnTo>
+                    <a:pt x="3335710" y="312905"/>
+                  </a:lnTo>
+                  <a:lnTo>
+                    <a:pt x="3335710" y="235357"/>
+                  </a:lnTo>
+                  <a:lnTo>
+                    <a:pt x="6300786" y="235357"/>
+                  </a:lnTo>
+                  <a:lnTo>
+                    <a:pt x="6300786" y="158190"/>
+                  </a:lnTo>
+                  <a:lnTo>
+                    <a:pt x="6578762" y="158190"/>
+                  </a:lnTo>
+                  <a:lnTo>
+                    <a:pt x="6578762" y="79519"/>
+                  </a:lnTo>
+                  <a:lnTo>
+                    <a:pt x="6949396" y="79519"/>
                   </a:lnTo>
                   <a:lnTo>
                     <a:pt x="6949396" y="0"/>
@@ -3106,77 +3106,77 @@
           <p:spPr>
             <a:xfrm>
               <a:off x="1320344" y="2861938"/>
-              <a:ext cx="6949396" cy="2544134"/>
+              <a:ext cx="6949396" cy="2545918"/>
             </a:xfrm>
             <a:custGeom>
               <a:avLst/>
               <a:pathLst>
-                <a:path w="6949396" h="2544134">
+                <a:path w="6949396" h="2545918">
                   <a:moveTo>
-                    <a:pt x="0" y="2544134"/>
+                    <a:pt x="0" y="2545918"/>
                   </a:moveTo>
                   <a:lnTo>
-                    <a:pt x="185317" y="2544134"/>
-                  </a:lnTo>
-                  <a:lnTo>
-                    <a:pt x="185317" y="1870264"/>
-                  </a:lnTo>
-                  <a:lnTo>
-                    <a:pt x="277975" y="1870264"/>
-                  </a:lnTo>
-                  <a:lnTo>
-                    <a:pt x="277975" y="1697190"/>
-                  </a:lnTo>
-                  <a:lnTo>
-                    <a:pt x="370634" y="1697190"/>
-                  </a:lnTo>
-                  <a:lnTo>
-                    <a:pt x="370634" y="1522973"/>
-                  </a:lnTo>
-                  <a:lnTo>
-                    <a:pt x="1482537" y="1522973"/>
-                  </a:lnTo>
-                  <a:lnTo>
-                    <a:pt x="1482537" y="1350116"/>
-                  </a:lnTo>
-                  <a:lnTo>
-                    <a:pt x="1945831" y="1350116"/>
-                  </a:lnTo>
-                  <a:lnTo>
-                    <a:pt x="1945831" y="1177170"/>
-                  </a:lnTo>
-                  <a:lnTo>
-                    <a:pt x="2223806" y="1177170"/>
-                  </a:lnTo>
-                  <a:lnTo>
-                    <a:pt x="2223806" y="1005315"/>
-                  </a:lnTo>
-                  <a:lnTo>
-                    <a:pt x="3057734" y="1005315"/>
-                  </a:lnTo>
-                  <a:lnTo>
-                    <a:pt x="3057734" y="666871"/>
-                  </a:lnTo>
-                  <a:lnTo>
-                    <a:pt x="3335710" y="666871"/>
-                  </a:lnTo>
-                  <a:lnTo>
-                    <a:pt x="3335710" y="498710"/>
-                  </a:lnTo>
-                  <a:lnTo>
-                    <a:pt x="6300786" y="498710"/>
-                  </a:lnTo>
-                  <a:lnTo>
-                    <a:pt x="6300786" y="333345"/>
-                  </a:lnTo>
-                  <a:lnTo>
-                    <a:pt x="6578762" y="333345"/>
-                  </a:lnTo>
-                  <a:lnTo>
-                    <a:pt x="6578762" y="166772"/>
-                  </a:lnTo>
-                  <a:lnTo>
-                    <a:pt x="6949396" y="166772"/>
+                    <a:pt x="185317" y="2545918"/>
+                  </a:lnTo>
+                  <a:lnTo>
+                    <a:pt x="185317" y="1877244"/>
+                  </a:lnTo>
+                  <a:lnTo>
+                    <a:pt x="277975" y="1877244"/>
+                  </a:lnTo>
+                  <a:lnTo>
+                    <a:pt x="277975" y="1705101"/>
+                  </a:lnTo>
+                  <a:lnTo>
+                    <a:pt x="370634" y="1705101"/>
+                  </a:lnTo>
+                  <a:lnTo>
+                    <a:pt x="370634" y="1531551"/>
+                  </a:lnTo>
+                  <a:lnTo>
+                    <a:pt x="1482537" y="1531551"/>
+                  </a:lnTo>
+                  <a:lnTo>
+                    <a:pt x="1482537" y="1358323"/>
+                  </a:lnTo>
+                  <a:lnTo>
+                    <a:pt x="1945831" y="1358323"/>
+                  </a:lnTo>
+                  <a:lnTo>
+                    <a:pt x="1945831" y="1184352"/>
+                  </a:lnTo>
+                  <a:lnTo>
+                    <a:pt x="2223806" y="1184352"/>
+                  </a:lnTo>
+                  <a:lnTo>
+                    <a:pt x="2223806" y="1011269"/>
+                  </a:lnTo>
+                  <a:lnTo>
+                    <a:pt x="3057734" y="1011269"/>
+                  </a:lnTo>
+                  <a:lnTo>
+                    <a:pt x="3057734" y="670683"/>
+                  </a:lnTo>
+                  <a:lnTo>
+                    <a:pt x="3335710" y="670683"/>
+                  </a:lnTo>
+                  <a:lnTo>
+                    <a:pt x="3335710" y="501879"/>
+                  </a:lnTo>
+                  <a:lnTo>
+                    <a:pt x="6300786" y="501879"/>
+                  </a:lnTo>
+                  <a:lnTo>
+                    <a:pt x="6300786" y="335606"/>
+                  </a:lnTo>
+                  <a:lnTo>
+                    <a:pt x="6578762" y="335606"/>
+                  </a:lnTo>
+                  <a:lnTo>
+                    <a:pt x="6578762" y="167826"/>
+                  </a:lnTo>
+                  <a:lnTo>
+                    <a:pt x="6949396" y="167826"/>
                   </a:lnTo>
                   <a:lnTo>
                     <a:pt x="6949396" y="0"/>
@@ -3254,7 +3254,7 @@
           </p:nvSpPr>
           <p:spPr>
             <a:xfrm>
-              <a:off x="692708" y="4864293"/>
+              <a:off x="692708" y="4849406"/>
               <a:ext cx="217535" cy="80101"/>
             </a:xfrm>
             <a:prstGeom prst="rect">
@@ -3300,7 +3300,7 @@
           </p:nvSpPr>
           <p:spPr>
             <a:xfrm>
-              <a:off x="692708" y="4188215"/>
+              <a:off x="692708" y="4158442"/>
               <a:ext cx="217535" cy="80101"/>
             </a:xfrm>
             <a:prstGeom prst="rect">
@@ -3346,7 +3346,7 @@
           </p:nvSpPr>
           <p:spPr>
             <a:xfrm>
-              <a:off x="692708" y="3512138"/>
+              <a:off x="692708" y="3467477"/>
               <a:ext cx="217535" cy="80101"/>
             </a:xfrm>
             <a:prstGeom prst="rect">
@@ -3392,7 +3392,7 @@
           </p:nvSpPr>
           <p:spPr>
             <a:xfrm>
-              <a:off x="692708" y="2836060"/>
+              <a:off x="692708" y="2776513"/>
               <a:ext cx="217535" cy="80101"/>
             </a:xfrm>
             <a:prstGeom prst="rect">
@@ -3919,7 +3919,7 @@
                   <a:latin typeface="Helvetica"/>
                   <a:cs typeface="Helvetica"/>
                 </a:rPr>
-                <a:t>Discrep &gt;= +25 vs &lt;+25: subHR = 2.60 (95% CI 0.87-7.72), p = 0.086</a:t>
+                <a:t>Discrep &gt;= +25 vs &lt;+25: subHR = 2.45 (95% CI 0.76-7.96), p = 0.135</a:t>
               </a:r>
             </a:p>
           </p:txBody>

--- a/docs/plots/carbo/jx_carbo_adjcif_grade3.pptx
+++ b/docs/plots/carbo/jx_carbo_adjcif_grade3.pptx
@@ -2271,7 +2271,7 @@
           </p:nvSpPr>
           <p:spPr>
             <a:xfrm>
-              <a:off x="972874" y="5234939"/>
+              <a:off x="972874" y="5230326"/>
               <a:ext cx="7644336" cy="0"/>
             </a:xfrm>
             <a:custGeom>
@@ -2314,7 +2314,7 @@
           </p:nvSpPr>
           <p:spPr>
             <a:xfrm>
-              <a:off x="972874" y="4543975"/>
+              <a:off x="972874" y="4530134"/>
               <a:ext cx="7644336" cy="0"/>
             </a:xfrm>
             <a:custGeom>
@@ -2357,7 +2357,7 @@
           </p:nvSpPr>
           <p:spPr>
             <a:xfrm>
-              <a:off x="972874" y="3853010"/>
+              <a:off x="972874" y="3829942"/>
               <a:ext cx="7644336" cy="0"/>
             </a:xfrm>
             <a:custGeom>
@@ -2400,7 +2400,7 @@
           </p:nvSpPr>
           <p:spPr>
             <a:xfrm>
-              <a:off x="972874" y="3162046"/>
+              <a:off x="972874" y="3129750"/>
               <a:ext cx="7644336" cy="0"/>
             </a:xfrm>
             <a:custGeom>
@@ -2658,7 +2658,7 @@
           </p:nvSpPr>
           <p:spPr>
             <a:xfrm>
-              <a:off x="972874" y="4889457"/>
+              <a:off x="972874" y="4880230"/>
               <a:ext cx="7644336" cy="0"/>
             </a:xfrm>
             <a:custGeom>
@@ -2701,7 +2701,7 @@
           </p:nvSpPr>
           <p:spPr>
             <a:xfrm>
-              <a:off x="972874" y="4198493"/>
+              <a:off x="972874" y="4180038"/>
               <a:ext cx="7644336" cy="0"/>
             </a:xfrm>
             <a:custGeom>
@@ -2744,7 +2744,7 @@
           </p:nvSpPr>
           <p:spPr>
             <a:xfrm>
-              <a:off x="972874" y="3507528"/>
+              <a:off x="972874" y="3479846"/>
               <a:ext cx="7644336" cy="0"/>
             </a:xfrm>
             <a:custGeom>
@@ -2787,7 +2787,7 @@
           </p:nvSpPr>
           <p:spPr>
             <a:xfrm>
-              <a:off x="972874" y="2816563"/>
+              <a:off x="972874" y="2779654"/>
               <a:ext cx="7644336" cy="0"/>
             </a:xfrm>
             <a:custGeom>
@@ -3002,78 +3002,78 @@
           </p:nvSpPr>
           <p:spPr>
             <a:xfrm>
-              <a:off x="1320344" y="4384373"/>
-              <a:ext cx="6949396" cy="1125402"/>
+              <a:off x="1320344" y="4352830"/>
+              <a:ext cx="6949396" cy="1155467"/>
             </a:xfrm>
             <a:custGeom>
               <a:avLst/>
               <a:pathLst>
-                <a:path w="6949396" h="1125402">
+                <a:path w="6949396" h="1155467">
                   <a:moveTo>
-                    <a:pt x="0" y="1125402"/>
+                    <a:pt x="0" y="1155467"/>
                   </a:moveTo>
                   <a:lnTo>
-                    <a:pt x="185317" y="1125402"/>
-                  </a:lnTo>
-                  <a:lnTo>
-                    <a:pt x="185317" y="845409"/>
-                  </a:lnTo>
-                  <a:lnTo>
-                    <a:pt x="277975" y="845409"/>
-                  </a:lnTo>
-                  <a:lnTo>
-                    <a:pt x="277975" y="771656"/>
-                  </a:lnTo>
-                  <a:lnTo>
-                    <a:pt x="370634" y="771656"/>
-                  </a:lnTo>
-                  <a:lnTo>
-                    <a:pt x="370634" y="696580"/>
-                  </a:lnTo>
-                  <a:lnTo>
-                    <a:pt x="1482537" y="696580"/>
-                  </a:lnTo>
-                  <a:lnTo>
-                    <a:pt x="1482537" y="620903"/>
-                  </a:lnTo>
-                  <a:lnTo>
-                    <a:pt x="1945831" y="620903"/>
-                  </a:lnTo>
-                  <a:lnTo>
-                    <a:pt x="1945831" y="544144"/>
-                  </a:lnTo>
-                  <a:lnTo>
-                    <a:pt x="2223806" y="544144"/>
-                  </a:lnTo>
-                  <a:lnTo>
-                    <a:pt x="2223806" y="467006"/>
-                  </a:lnTo>
-                  <a:lnTo>
-                    <a:pt x="3057734" y="467006"/>
-                  </a:lnTo>
-                  <a:lnTo>
-                    <a:pt x="3057734" y="312905"/>
-                  </a:lnTo>
-                  <a:lnTo>
-                    <a:pt x="3335710" y="312905"/>
-                  </a:lnTo>
-                  <a:lnTo>
-                    <a:pt x="3335710" y="235357"/>
-                  </a:lnTo>
-                  <a:lnTo>
-                    <a:pt x="6300786" y="235357"/>
-                  </a:lnTo>
-                  <a:lnTo>
-                    <a:pt x="6300786" y="158190"/>
-                  </a:lnTo>
-                  <a:lnTo>
-                    <a:pt x="6578762" y="158190"/>
-                  </a:lnTo>
-                  <a:lnTo>
-                    <a:pt x="6578762" y="79519"/>
-                  </a:lnTo>
-                  <a:lnTo>
-                    <a:pt x="6949396" y="79519"/>
+                    <a:pt x="185317" y="1155467"/>
+                  </a:lnTo>
+                  <a:lnTo>
+                    <a:pt x="185317" y="869831"/>
+                  </a:lnTo>
+                  <a:lnTo>
+                    <a:pt x="277975" y="869831"/>
+                  </a:lnTo>
+                  <a:lnTo>
+                    <a:pt x="277975" y="794533"/>
+                  </a:lnTo>
+                  <a:lnTo>
+                    <a:pt x="370634" y="794533"/>
+                  </a:lnTo>
+                  <a:lnTo>
+                    <a:pt x="370634" y="717723"/>
+                  </a:lnTo>
+                  <a:lnTo>
+                    <a:pt x="1482537" y="717723"/>
+                  </a:lnTo>
+                  <a:lnTo>
+                    <a:pt x="1482537" y="640108"/>
+                  </a:lnTo>
+                  <a:lnTo>
+                    <a:pt x="1945831" y="640108"/>
+                  </a:lnTo>
+                  <a:lnTo>
+                    <a:pt x="1945831" y="561205"/>
+                  </a:lnTo>
+                  <a:lnTo>
+                    <a:pt x="2223806" y="561205"/>
+                  </a:lnTo>
+                  <a:lnTo>
+                    <a:pt x="2223806" y="481648"/>
+                  </a:lnTo>
+                  <a:lnTo>
+                    <a:pt x="3057734" y="481648"/>
+                  </a:lnTo>
+                  <a:lnTo>
+                    <a:pt x="3057734" y="322604"/>
+                  </a:lnTo>
+                  <a:lnTo>
+                    <a:pt x="3335710" y="322604"/>
+                  </a:lnTo>
+                  <a:lnTo>
+                    <a:pt x="3335710" y="242778"/>
+                  </a:lnTo>
+                  <a:lnTo>
+                    <a:pt x="6300786" y="242778"/>
+                  </a:lnTo>
+                  <a:lnTo>
+                    <a:pt x="6300786" y="163515"/>
+                  </a:lnTo>
+                  <a:lnTo>
+                    <a:pt x="6578762" y="163515"/>
+                  </a:lnTo>
+                  <a:lnTo>
+                    <a:pt x="6578762" y="82363"/>
+                  </a:lnTo>
+                  <a:lnTo>
+                    <a:pt x="6949396" y="82363"/>
                   </a:lnTo>
                   <a:lnTo>
                     <a:pt x="6949396" y="0"/>
@@ -3106,77 +3106,77 @@
           <p:spPr>
             <a:xfrm>
               <a:off x="1320344" y="2861938"/>
-              <a:ext cx="6949396" cy="2545918"/>
+              <a:ext cx="6949396" cy="2545979"/>
             </a:xfrm>
             <a:custGeom>
               <a:avLst/>
               <a:pathLst>
-                <a:path w="6949396" h="2545918">
+                <a:path w="6949396" h="2545979">
                   <a:moveTo>
-                    <a:pt x="0" y="2545918"/>
+                    <a:pt x="0" y="2545979"/>
                   </a:moveTo>
                   <a:lnTo>
-                    <a:pt x="185317" y="2545918"/>
-                  </a:lnTo>
-                  <a:lnTo>
-                    <a:pt x="185317" y="1877244"/>
-                  </a:lnTo>
-                  <a:lnTo>
-                    <a:pt x="277975" y="1877244"/>
-                  </a:lnTo>
-                  <a:lnTo>
-                    <a:pt x="277975" y="1705101"/>
-                  </a:lnTo>
-                  <a:lnTo>
-                    <a:pt x="370634" y="1705101"/>
-                  </a:lnTo>
-                  <a:lnTo>
-                    <a:pt x="370634" y="1531551"/>
-                  </a:lnTo>
-                  <a:lnTo>
-                    <a:pt x="1482537" y="1531551"/>
-                  </a:lnTo>
-                  <a:lnTo>
-                    <a:pt x="1482537" y="1358323"/>
-                  </a:lnTo>
-                  <a:lnTo>
-                    <a:pt x="1945831" y="1358323"/>
-                  </a:lnTo>
-                  <a:lnTo>
-                    <a:pt x="1945831" y="1184352"/>
-                  </a:lnTo>
-                  <a:lnTo>
-                    <a:pt x="2223806" y="1184352"/>
-                  </a:lnTo>
-                  <a:lnTo>
-                    <a:pt x="2223806" y="1011269"/>
-                  </a:lnTo>
-                  <a:lnTo>
-                    <a:pt x="3057734" y="1011269"/>
-                  </a:lnTo>
-                  <a:lnTo>
-                    <a:pt x="3057734" y="670683"/>
-                  </a:lnTo>
-                  <a:lnTo>
-                    <a:pt x="3335710" y="670683"/>
-                  </a:lnTo>
-                  <a:lnTo>
-                    <a:pt x="3335710" y="501879"/>
-                  </a:lnTo>
-                  <a:lnTo>
-                    <a:pt x="6300786" y="501879"/>
-                  </a:lnTo>
-                  <a:lnTo>
-                    <a:pt x="6300786" y="335606"/>
-                  </a:lnTo>
-                  <a:lnTo>
-                    <a:pt x="6578762" y="335606"/>
-                  </a:lnTo>
-                  <a:lnTo>
-                    <a:pt x="6578762" y="167826"/>
-                  </a:lnTo>
-                  <a:lnTo>
-                    <a:pt x="6949396" y="167826"/>
+                    <a:pt x="185317" y="2545979"/>
+                  </a:lnTo>
+                  <a:lnTo>
+                    <a:pt x="185317" y="1878944"/>
+                  </a:lnTo>
+                  <a:lnTo>
+                    <a:pt x="277975" y="1878944"/>
+                  </a:lnTo>
+                  <a:lnTo>
+                    <a:pt x="277975" y="1707332"/>
+                  </a:lnTo>
+                  <a:lnTo>
+                    <a:pt x="370634" y="1707332"/>
+                  </a:lnTo>
+                  <a:lnTo>
+                    <a:pt x="370634" y="1534068"/>
+                  </a:lnTo>
+                  <a:lnTo>
+                    <a:pt x="1482537" y="1534068"/>
+                  </a:lnTo>
+                  <a:lnTo>
+                    <a:pt x="1482537" y="1360810"/>
+                  </a:lnTo>
+                  <a:lnTo>
+                    <a:pt x="1945831" y="1360810"/>
+                  </a:lnTo>
+                  <a:lnTo>
+                    <a:pt x="1945831" y="1186545"/>
+                  </a:lnTo>
+                  <a:lnTo>
+                    <a:pt x="2223806" y="1186545"/>
+                  </a:lnTo>
+                  <a:lnTo>
+                    <a:pt x="2223806" y="1012724"/>
+                  </a:lnTo>
+                  <a:lnTo>
+                    <a:pt x="3057734" y="1012724"/>
+                  </a:lnTo>
+                  <a:lnTo>
+                    <a:pt x="3057734" y="670855"/>
+                  </a:lnTo>
+                  <a:lnTo>
+                    <a:pt x="3335710" y="670855"/>
+                  </a:lnTo>
+                  <a:lnTo>
+                    <a:pt x="3335710" y="502063"/>
+                  </a:lnTo>
+                  <a:lnTo>
+                    <a:pt x="6300786" y="502063"/>
+                  </a:lnTo>
+                  <a:lnTo>
+                    <a:pt x="6300786" y="336290"/>
+                  </a:lnTo>
+                  <a:lnTo>
+                    <a:pt x="6578762" y="336290"/>
+                  </a:lnTo>
+                  <a:lnTo>
+                    <a:pt x="6578762" y="168437"/>
+                  </a:lnTo>
+                  <a:lnTo>
+                    <a:pt x="6949396" y="168437"/>
                   </a:lnTo>
                   <a:lnTo>
                     <a:pt x="6949396" y="0"/>
@@ -3254,7 +3254,7 @@
           </p:nvSpPr>
           <p:spPr>
             <a:xfrm>
-              <a:off x="692708" y="4849406"/>
+              <a:off x="692708" y="4840179"/>
               <a:ext cx="217535" cy="80101"/>
             </a:xfrm>
             <a:prstGeom prst="rect">
@@ -3300,7 +3300,7 @@
           </p:nvSpPr>
           <p:spPr>
             <a:xfrm>
-              <a:off x="692708" y="4158442"/>
+              <a:off x="692708" y="4139987"/>
               <a:ext cx="217535" cy="80101"/>
             </a:xfrm>
             <a:prstGeom prst="rect">
@@ -3346,7 +3346,7 @@
           </p:nvSpPr>
           <p:spPr>
             <a:xfrm>
-              <a:off x="692708" y="3467477"/>
+              <a:off x="692708" y="3439795"/>
               <a:ext cx="217535" cy="80101"/>
             </a:xfrm>
             <a:prstGeom prst="rect">
@@ -3392,7 +3392,7 @@
           </p:nvSpPr>
           <p:spPr>
             <a:xfrm>
-              <a:off x="692708" y="2776513"/>
+              <a:off x="692708" y="2739603"/>
               <a:ext cx="217535" cy="80101"/>
             </a:xfrm>
             <a:prstGeom prst="rect">
@@ -3919,7 +3919,7 @@
                   <a:latin typeface="Helvetica"/>
                   <a:cs typeface="Helvetica"/>
                 </a:rPr>
-                <a:t>Discrep &gt;= +25 vs &lt;+25: subHR = 2.45 (95% CI 0.76-7.96), p = 0.135</a:t>
+                <a:t>Discrep &gt;= +25 vs &lt;+25: subHR = 2.40 (95% CI 0.82-7.01), p = 0.108</a:t>
               </a:r>
             </a:p>
           </p:txBody>

--- a/docs/plots/carbo/jx_carbo_adjcif_grade3.pptx
+++ b/docs/plots/carbo/jx_carbo_adjcif_grade3.pptx
@@ -2271,7 +2271,7 @@
           </p:nvSpPr>
           <p:spPr>
             <a:xfrm>
-              <a:off x="972874" y="5230326"/>
+              <a:off x="972874" y="5234939"/>
               <a:ext cx="7644336" cy="0"/>
             </a:xfrm>
             <a:custGeom>
@@ -2314,7 +2314,7 @@
           </p:nvSpPr>
           <p:spPr>
             <a:xfrm>
-              <a:off x="972874" y="4530134"/>
+              <a:off x="972874" y="4543975"/>
               <a:ext cx="7644336" cy="0"/>
             </a:xfrm>
             <a:custGeom>
@@ -2357,7 +2357,7 @@
           </p:nvSpPr>
           <p:spPr>
             <a:xfrm>
-              <a:off x="972874" y="3829942"/>
+              <a:off x="972874" y="3853010"/>
               <a:ext cx="7644336" cy="0"/>
             </a:xfrm>
             <a:custGeom>
@@ -2400,7 +2400,7 @@
           </p:nvSpPr>
           <p:spPr>
             <a:xfrm>
-              <a:off x="972874" y="3129750"/>
+              <a:off x="972874" y="3162046"/>
               <a:ext cx="7644336" cy="0"/>
             </a:xfrm>
             <a:custGeom>
@@ -2658,7 +2658,7 @@
           </p:nvSpPr>
           <p:spPr>
             <a:xfrm>
-              <a:off x="972874" y="4880230"/>
+              <a:off x="972874" y="4889457"/>
               <a:ext cx="7644336" cy="0"/>
             </a:xfrm>
             <a:custGeom>
@@ -2701,7 +2701,7 @@
           </p:nvSpPr>
           <p:spPr>
             <a:xfrm>
-              <a:off x="972874" y="4180038"/>
+              <a:off x="972874" y="4198493"/>
               <a:ext cx="7644336" cy="0"/>
             </a:xfrm>
             <a:custGeom>
@@ -2744,7 +2744,7 @@
           </p:nvSpPr>
           <p:spPr>
             <a:xfrm>
-              <a:off x="972874" y="3479846"/>
+              <a:off x="972874" y="3507528"/>
               <a:ext cx="7644336" cy="0"/>
             </a:xfrm>
             <a:custGeom>
@@ -2787,7 +2787,7 @@
           </p:nvSpPr>
           <p:spPr>
             <a:xfrm>
-              <a:off x="972874" y="2779654"/>
+              <a:off x="972874" y="2816563"/>
               <a:ext cx="7644336" cy="0"/>
             </a:xfrm>
             <a:custGeom>
@@ -3002,78 +3002,78 @@
           </p:nvSpPr>
           <p:spPr>
             <a:xfrm>
-              <a:off x="1320344" y="4352830"/>
-              <a:ext cx="6949396" cy="1155467"/>
+              <a:off x="1320344" y="4384373"/>
+              <a:ext cx="6949396" cy="1125402"/>
             </a:xfrm>
             <a:custGeom>
               <a:avLst/>
               <a:pathLst>
-                <a:path w="6949396" h="1155467">
+                <a:path w="6949396" h="1125402">
                   <a:moveTo>
-                    <a:pt x="0" y="1155467"/>
+                    <a:pt x="0" y="1125402"/>
                   </a:moveTo>
                   <a:lnTo>
-                    <a:pt x="185317" y="1155467"/>
-                  </a:lnTo>
-                  <a:lnTo>
-                    <a:pt x="185317" y="869831"/>
-                  </a:lnTo>
-                  <a:lnTo>
-                    <a:pt x="277975" y="869831"/>
-                  </a:lnTo>
-                  <a:lnTo>
-                    <a:pt x="277975" y="794533"/>
-                  </a:lnTo>
-                  <a:lnTo>
-                    <a:pt x="370634" y="794533"/>
-                  </a:lnTo>
-                  <a:lnTo>
-                    <a:pt x="370634" y="717723"/>
-                  </a:lnTo>
-                  <a:lnTo>
-                    <a:pt x="1482537" y="717723"/>
-                  </a:lnTo>
-                  <a:lnTo>
-                    <a:pt x="1482537" y="640108"/>
-                  </a:lnTo>
-                  <a:lnTo>
-                    <a:pt x="1945831" y="640108"/>
-                  </a:lnTo>
-                  <a:lnTo>
-                    <a:pt x="1945831" y="561205"/>
-                  </a:lnTo>
-                  <a:lnTo>
-                    <a:pt x="2223806" y="561205"/>
-                  </a:lnTo>
-                  <a:lnTo>
-                    <a:pt x="2223806" y="481648"/>
-                  </a:lnTo>
-                  <a:lnTo>
-                    <a:pt x="3057734" y="481648"/>
-                  </a:lnTo>
-                  <a:lnTo>
-                    <a:pt x="3057734" y="322604"/>
-                  </a:lnTo>
-                  <a:lnTo>
-                    <a:pt x="3335710" y="322604"/>
-                  </a:lnTo>
-                  <a:lnTo>
-                    <a:pt x="3335710" y="242778"/>
-                  </a:lnTo>
-                  <a:lnTo>
-                    <a:pt x="6300786" y="242778"/>
-                  </a:lnTo>
-                  <a:lnTo>
-                    <a:pt x="6300786" y="163515"/>
-                  </a:lnTo>
-                  <a:lnTo>
-                    <a:pt x="6578762" y="163515"/>
-                  </a:lnTo>
-                  <a:lnTo>
-                    <a:pt x="6578762" y="82363"/>
-                  </a:lnTo>
-                  <a:lnTo>
-                    <a:pt x="6949396" y="82363"/>
+                    <a:pt x="185317" y="1125402"/>
+                  </a:lnTo>
+                  <a:lnTo>
+                    <a:pt x="185317" y="845409"/>
+                  </a:lnTo>
+                  <a:lnTo>
+                    <a:pt x="277975" y="845409"/>
+                  </a:lnTo>
+                  <a:lnTo>
+                    <a:pt x="277975" y="771656"/>
+                  </a:lnTo>
+                  <a:lnTo>
+                    <a:pt x="370634" y="771656"/>
+                  </a:lnTo>
+                  <a:lnTo>
+                    <a:pt x="370634" y="696580"/>
+                  </a:lnTo>
+                  <a:lnTo>
+                    <a:pt x="1482537" y="696580"/>
+                  </a:lnTo>
+                  <a:lnTo>
+                    <a:pt x="1482537" y="620903"/>
+                  </a:lnTo>
+                  <a:lnTo>
+                    <a:pt x="1945831" y="620903"/>
+                  </a:lnTo>
+                  <a:lnTo>
+                    <a:pt x="1945831" y="544144"/>
+                  </a:lnTo>
+                  <a:lnTo>
+                    <a:pt x="2223806" y="544144"/>
+                  </a:lnTo>
+                  <a:lnTo>
+                    <a:pt x="2223806" y="467006"/>
+                  </a:lnTo>
+                  <a:lnTo>
+                    <a:pt x="3057734" y="467006"/>
+                  </a:lnTo>
+                  <a:lnTo>
+                    <a:pt x="3057734" y="312905"/>
+                  </a:lnTo>
+                  <a:lnTo>
+                    <a:pt x="3335710" y="312905"/>
+                  </a:lnTo>
+                  <a:lnTo>
+                    <a:pt x="3335710" y="235357"/>
+                  </a:lnTo>
+                  <a:lnTo>
+                    <a:pt x="6300786" y="235357"/>
+                  </a:lnTo>
+                  <a:lnTo>
+                    <a:pt x="6300786" y="158190"/>
+                  </a:lnTo>
+                  <a:lnTo>
+                    <a:pt x="6578762" y="158190"/>
+                  </a:lnTo>
+                  <a:lnTo>
+                    <a:pt x="6578762" y="79519"/>
+                  </a:lnTo>
+                  <a:lnTo>
+                    <a:pt x="6949396" y="79519"/>
                   </a:lnTo>
                   <a:lnTo>
                     <a:pt x="6949396" y="0"/>
@@ -3106,77 +3106,77 @@
           <p:spPr>
             <a:xfrm>
               <a:off x="1320344" y="2861938"/>
-              <a:ext cx="6949396" cy="2545979"/>
+              <a:ext cx="6949396" cy="2545918"/>
             </a:xfrm>
             <a:custGeom>
               <a:avLst/>
               <a:pathLst>
-                <a:path w="6949396" h="2545979">
+                <a:path w="6949396" h="2545918">
                   <a:moveTo>
-                    <a:pt x="0" y="2545979"/>
+                    <a:pt x="0" y="2545918"/>
                   </a:moveTo>
                   <a:lnTo>
-                    <a:pt x="185317" y="2545979"/>
-                  </a:lnTo>
-                  <a:lnTo>
-                    <a:pt x="185317" y="1878944"/>
-                  </a:lnTo>
-                  <a:lnTo>
-                    <a:pt x="277975" y="1878944"/>
-                  </a:lnTo>
-                  <a:lnTo>
-                    <a:pt x="277975" y="1707332"/>
-                  </a:lnTo>
-                  <a:lnTo>
-                    <a:pt x="370634" y="1707332"/>
-                  </a:lnTo>
-                  <a:lnTo>
-                    <a:pt x="370634" y="1534068"/>
-                  </a:lnTo>
-                  <a:lnTo>
-                    <a:pt x="1482537" y="1534068"/>
-                  </a:lnTo>
-                  <a:lnTo>
-                    <a:pt x="1482537" y="1360810"/>
-                  </a:lnTo>
-                  <a:lnTo>
-                    <a:pt x="1945831" y="1360810"/>
-                  </a:lnTo>
-                  <a:lnTo>
-                    <a:pt x="1945831" y="1186545"/>
-                  </a:lnTo>
-                  <a:lnTo>
-                    <a:pt x="2223806" y="1186545"/>
-                  </a:lnTo>
-                  <a:lnTo>
-                    <a:pt x="2223806" y="1012724"/>
-                  </a:lnTo>
-                  <a:lnTo>
-                    <a:pt x="3057734" y="1012724"/>
-                  </a:lnTo>
-                  <a:lnTo>
-                    <a:pt x="3057734" y="670855"/>
-                  </a:lnTo>
-                  <a:lnTo>
-                    <a:pt x="3335710" y="670855"/>
-                  </a:lnTo>
-                  <a:lnTo>
-                    <a:pt x="3335710" y="502063"/>
-                  </a:lnTo>
-                  <a:lnTo>
-                    <a:pt x="6300786" y="502063"/>
-                  </a:lnTo>
-                  <a:lnTo>
-                    <a:pt x="6300786" y="336290"/>
-                  </a:lnTo>
-                  <a:lnTo>
-                    <a:pt x="6578762" y="336290"/>
-                  </a:lnTo>
-                  <a:lnTo>
-                    <a:pt x="6578762" y="168437"/>
-                  </a:lnTo>
-                  <a:lnTo>
-                    <a:pt x="6949396" y="168437"/>
+                    <a:pt x="185317" y="2545918"/>
+                  </a:lnTo>
+                  <a:lnTo>
+                    <a:pt x="185317" y="1877244"/>
+                  </a:lnTo>
+                  <a:lnTo>
+                    <a:pt x="277975" y="1877244"/>
+                  </a:lnTo>
+                  <a:lnTo>
+                    <a:pt x="277975" y="1705101"/>
+                  </a:lnTo>
+                  <a:lnTo>
+                    <a:pt x="370634" y="1705101"/>
+                  </a:lnTo>
+                  <a:lnTo>
+                    <a:pt x="370634" y="1531551"/>
+                  </a:lnTo>
+                  <a:lnTo>
+                    <a:pt x="1482537" y="1531551"/>
+                  </a:lnTo>
+                  <a:lnTo>
+                    <a:pt x="1482537" y="1358323"/>
+                  </a:lnTo>
+                  <a:lnTo>
+                    <a:pt x="1945831" y="1358323"/>
+                  </a:lnTo>
+                  <a:lnTo>
+                    <a:pt x="1945831" y="1184352"/>
+                  </a:lnTo>
+                  <a:lnTo>
+                    <a:pt x="2223806" y="1184352"/>
+                  </a:lnTo>
+                  <a:lnTo>
+                    <a:pt x="2223806" y="1011269"/>
+                  </a:lnTo>
+                  <a:lnTo>
+                    <a:pt x="3057734" y="1011269"/>
+                  </a:lnTo>
+                  <a:lnTo>
+                    <a:pt x="3057734" y="670683"/>
+                  </a:lnTo>
+                  <a:lnTo>
+                    <a:pt x="3335710" y="670683"/>
+                  </a:lnTo>
+                  <a:lnTo>
+                    <a:pt x="3335710" y="501879"/>
+                  </a:lnTo>
+                  <a:lnTo>
+                    <a:pt x="6300786" y="501879"/>
+                  </a:lnTo>
+                  <a:lnTo>
+                    <a:pt x="6300786" y="335606"/>
+                  </a:lnTo>
+                  <a:lnTo>
+                    <a:pt x="6578762" y="335606"/>
+                  </a:lnTo>
+                  <a:lnTo>
+                    <a:pt x="6578762" y="167826"/>
+                  </a:lnTo>
+                  <a:lnTo>
+                    <a:pt x="6949396" y="167826"/>
                   </a:lnTo>
                   <a:lnTo>
                     <a:pt x="6949396" y="0"/>
@@ -3254,7 +3254,7 @@
           </p:nvSpPr>
           <p:spPr>
             <a:xfrm>
-              <a:off x="692708" y="4840179"/>
+              <a:off x="692708" y="4849406"/>
               <a:ext cx="217535" cy="80101"/>
             </a:xfrm>
             <a:prstGeom prst="rect">
@@ -3300,7 +3300,7 @@
           </p:nvSpPr>
           <p:spPr>
             <a:xfrm>
-              <a:off x="692708" y="4139987"/>
+              <a:off x="692708" y="4158442"/>
               <a:ext cx="217535" cy="80101"/>
             </a:xfrm>
             <a:prstGeom prst="rect">
@@ -3346,7 +3346,7 @@
           </p:nvSpPr>
           <p:spPr>
             <a:xfrm>
-              <a:off x="692708" y="3439795"/>
+              <a:off x="692708" y="3467477"/>
               <a:ext cx="217535" cy="80101"/>
             </a:xfrm>
             <a:prstGeom prst="rect">
@@ -3392,7 +3392,7 @@
           </p:nvSpPr>
           <p:spPr>
             <a:xfrm>
-              <a:off x="692708" y="2739603"/>
+              <a:off x="692708" y="2776513"/>
               <a:ext cx="217535" cy="80101"/>
             </a:xfrm>
             <a:prstGeom prst="rect">
@@ -3919,7 +3919,7 @@
                   <a:latin typeface="Helvetica"/>
                   <a:cs typeface="Helvetica"/>
                 </a:rPr>
-                <a:t>Discrep &gt;= +25 vs &lt;+25: subHR = 2.40 (95% CI 0.82-7.01), p = 0.108</a:t>
+                <a:t>Discrep &gt;= +25 vs &lt;+25: subHR = 2.45 (95% CI 0.76-7.96), p = 0.135</a:t>
               </a:r>
             </a:p>
           </p:txBody>

--- a/docs/plots/carbo/jx_carbo_adjcif_grade3.pptx
+++ b/docs/plots/carbo/jx_carbo_adjcif_grade3.pptx
@@ -2271,7 +2271,7 @@
           </p:nvSpPr>
           <p:spPr>
             <a:xfrm>
-              <a:off x="972874" y="5234939"/>
+              <a:off x="972874" y="5234940"/>
               <a:ext cx="7644336" cy="0"/>
             </a:xfrm>
             <a:custGeom>
@@ -2357,7 +2357,7 @@
           </p:nvSpPr>
           <p:spPr>
             <a:xfrm>
-              <a:off x="972874" y="3853010"/>
+              <a:off x="972874" y="3853011"/>
               <a:ext cx="7644336" cy="0"/>
             </a:xfrm>
             <a:custGeom>
@@ -2787,7 +2787,7 @@
           </p:nvSpPr>
           <p:spPr>
             <a:xfrm>
-              <a:off x="972874" y="2816563"/>
+              <a:off x="972874" y="2816564"/>
               <a:ext cx="7644336" cy="0"/>
             </a:xfrm>
             <a:custGeom>
@@ -3003,17 +3003,17 @@
           <p:spPr>
             <a:xfrm>
               <a:off x="1320344" y="4384373"/>
-              <a:ext cx="6949396" cy="1125402"/>
+              <a:ext cx="6949396" cy="1125401"/>
             </a:xfrm>
             <a:custGeom>
               <a:avLst/>
               <a:pathLst>
-                <a:path w="6949396" h="1125402">
+                <a:path w="6949396" h="1125401">
                   <a:moveTo>
-                    <a:pt x="0" y="1125402"/>
+                    <a:pt x="0" y="1125401"/>
                   </a:moveTo>
                   <a:lnTo>
-                    <a:pt x="185317" y="1125402"/>
+                    <a:pt x="185317" y="1125401"/>
                   </a:lnTo>
                   <a:lnTo>
                     <a:pt x="185317" y="845409"/>
@@ -3028,10 +3028,10 @@
                     <a:pt x="370634" y="771656"/>
                   </a:lnTo>
                   <a:lnTo>
-                    <a:pt x="370634" y="696580"/>
-                  </a:lnTo>
-                  <a:lnTo>
-                    <a:pt x="1482537" y="696580"/>
+                    <a:pt x="370634" y="696579"/>
+                  </a:lnTo>
+                  <a:lnTo>
+                    <a:pt x="1482537" y="696579"/>
                   </a:lnTo>
                   <a:lnTo>
                     <a:pt x="1482537" y="620903"/>
@@ -3254,7 +3254,7 @@
           </p:nvSpPr>
           <p:spPr>
             <a:xfrm>
-              <a:off x="692708" y="4849406"/>
+              <a:off x="692708" y="4849407"/>
               <a:ext cx="217535" cy="80101"/>
             </a:xfrm>
             <a:prstGeom prst="rect">
@@ -3346,7 +3346,7 @@
           </p:nvSpPr>
           <p:spPr>
             <a:xfrm>
-              <a:off x="692708" y="3467477"/>
+              <a:off x="692708" y="3467478"/>
               <a:ext cx="217535" cy="80101"/>
             </a:xfrm>
             <a:prstGeom prst="rect">

--- a/docs/plots/carbo/jx_carbo_adjcif_grade3.pptx
+++ b/docs/plots/carbo/jx_carbo_adjcif_grade3.pptx
@@ -2271,7 +2271,7 @@
           </p:nvSpPr>
           <p:spPr>
             <a:xfrm>
-              <a:off x="972874" y="5234940"/>
+              <a:off x="972874" y="5127975"/>
               <a:ext cx="7644336" cy="0"/>
             </a:xfrm>
             <a:custGeom>
@@ -2314,7 +2314,7 @@
           </p:nvSpPr>
           <p:spPr>
             <a:xfrm>
-              <a:off x="972874" y="4543975"/>
+              <a:off x="972874" y="4223080"/>
               <a:ext cx="7644336" cy="0"/>
             </a:xfrm>
             <a:custGeom>
@@ -2357,7 +2357,7 @@
           </p:nvSpPr>
           <p:spPr>
             <a:xfrm>
-              <a:off x="972874" y="3853011"/>
+              <a:off x="972874" y="3318186"/>
               <a:ext cx="7644336" cy="0"/>
             </a:xfrm>
             <a:custGeom>
@@ -2400,21 +2400,21 @@
           </p:nvSpPr>
           <p:spPr>
             <a:xfrm>
-              <a:off x="972874" y="3162046"/>
-              <a:ext cx="7644336" cy="0"/>
+              <a:off x="1413002" y="2583293"/>
+              <a:ext cx="0" cy="3139848"/>
             </a:xfrm>
             <a:custGeom>
               <a:avLst/>
               <a:pathLst>
-                <a:path w="7644336" h="0">
+                <a:path w="0" h="3139848">
                   <a:moveTo>
+                    <a:pt x="0" y="3139848"/>
+                  </a:moveTo>
+                  <a:lnTo>
                     <a:pt x="0" y="0"/>
-                  </a:moveTo>
-                  <a:lnTo>
-                    <a:pt x="7644336" y="0"/>
-                  </a:lnTo>
-                  <a:lnTo>
-                    <a:pt x="7644336" y="0"/>
+                  </a:lnTo>
+                  <a:lnTo>
+                    <a:pt x="0" y="0"/>
                   </a:lnTo>
                 </a:path>
               </a:pathLst>
@@ -2443,7 +2443,7 @@
           </p:nvSpPr>
           <p:spPr>
             <a:xfrm>
-              <a:off x="1413002" y="2583293"/>
+              <a:off x="3266175" y="2583293"/>
               <a:ext cx="0" cy="3139848"/>
             </a:xfrm>
             <a:custGeom>
@@ -2486,7 +2486,7 @@
           </p:nvSpPr>
           <p:spPr>
             <a:xfrm>
-              <a:off x="3266175" y="2583293"/>
+              <a:off x="5119347" y="2583293"/>
               <a:ext cx="0" cy="3139848"/>
             </a:xfrm>
             <a:custGeom>
@@ -2529,7 +2529,7 @@
           </p:nvSpPr>
           <p:spPr>
             <a:xfrm>
-              <a:off x="5119347" y="2583293"/>
+              <a:off x="6972520" y="2583293"/>
               <a:ext cx="0" cy="3139848"/>
             </a:xfrm>
             <a:custGeom>
@@ -2572,26 +2572,26 @@
           </p:nvSpPr>
           <p:spPr>
             <a:xfrm>
-              <a:off x="6972520" y="2583293"/>
-              <a:ext cx="0" cy="3139848"/>
+              <a:off x="972874" y="5580422"/>
+              <a:ext cx="7644336" cy="0"/>
             </a:xfrm>
             <a:custGeom>
               <a:avLst/>
               <a:pathLst>
-                <a:path w="0" h="3139848">
+                <a:path w="7644336" h="0">
                   <a:moveTo>
-                    <a:pt x="0" y="3139848"/>
+                    <a:pt x="0" y="0"/>
                   </a:moveTo>
                   <a:lnTo>
-                    <a:pt x="0" y="0"/>
-                  </a:lnTo>
-                  <a:lnTo>
-                    <a:pt x="0" y="0"/>
+                    <a:pt x="7644336" y="0"/>
+                  </a:lnTo>
+                  <a:lnTo>
+                    <a:pt x="7644336" y="0"/>
                   </a:lnTo>
                 </a:path>
               </a:pathLst>
             </a:custGeom>
-            <a:ln w="6775" cap="flat">
+            <a:ln w="13550" cap="flat">
               <a:solidFill>
                 <a:srgbClr val="EBEBEB">
                   <a:alpha val="100000"/>
@@ -2615,7 +2615,7 @@
           </p:nvSpPr>
           <p:spPr>
             <a:xfrm>
-              <a:off x="972874" y="5580422"/>
+              <a:off x="972874" y="4675527"/>
               <a:ext cx="7644336" cy="0"/>
             </a:xfrm>
             <a:custGeom>
@@ -2658,7 +2658,7 @@
           </p:nvSpPr>
           <p:spPr>
             <a:xfrm>
-              <a:off x="972874" y="4889457"/>
+              <a:off x="972874" y="3770633"/>
               <a:ext cx="7644336" cy="0"/>
             </a:xfrm>
             <a:custGeom>
@@ -2701,7 +2701,7 @@
           </p:nvSpPr>
           <p:spPr>
             <a:xfrm>
-              <a:off x="972874" y="4198493"/>
+              <a:off x="972874" y="2865739"/>
               <a:ext cx="7644336" cy="0"/>
             </a:xfrm>
             <a:custGeom>
@@ -2744,21 +2744,21 @@
           </p:nvSpPr>
           <p:spPr>
             <a:xfrm>
-              <a:off x="972874" y="3507528"/>
-              <a:ext cx="7644336" cy="0"/>
+              <a:off x="2339589" y="2583293"/>
+              <a:ext cx="0" cy="3139848"/>
             </a:xfrm>
             <a:custGeom>
               <a:avLst/>
               <a:pathLst>
-                <a:path w="7644336" h="0">
+                <a:path w="0" h="3139848">
                   <a:moveTo>
+                    <a:pt x="0" y="3139848"/>
+                  </a:moveTo>
+                  <a:lnTo>
                     <a:pt x="0" y="0"/>
-                  </a:moveTo>
-                  <a:lnTo>
-                    <a:pt x="7644336" y="0"/>
-                  </a:lnTo>
-                  <a:lnTo>
-                    <a:pt x="7644336" y="0"/>
+                  </a:lnTo>
+                  <a:lnTo>
+                    <a:pt x="0" y="0"/>
                   </a:lnTo>
                 </a:path>
               </a:pathLst>
@@ -2787,21 +2787,21 @@
           </p:nvSpPr>
           <p:spPr>
             <a:xfrm>
-              <a:off x="972874" y="2816564"/>
-              <a:ext cx="7644336" cy="0"/>
+              <a:off x="4192761" y="2583293"/>
+              <a:ext cx="0" cy="3139848"/>
             </a:xfrm>
             <a:custGeom>
               <a:avLst/>
               <a:pathLst>
-                <a:path w="7644336" h="0">
+                <a:path w="0" h="3139848">
                   <a:moveTo>
+                    <a:pt x="0" y="3139848"/>
+                  </a:moveTo>
+                  <a:lnTo>
                     <a:pt x="0" y="0"/>
-                  </a:moveTo>
-                  <a:lnTo>
-                    <a:pt x="7644336" y="0"/>
-                  </a:lnTo>
-                  <a:lnTo>
-                    <a:pt x="7644336" y="0"/>
+                  </a:lnTo>
+                  <a:lnTo>
+                    <a:pt x="0" y="0"/>
                   </a:lnTo>
                 </a:path>
               </a:pathLst>
@@ -2830,7 +2830,7 @@
           </p:nvSpPr>
           <p:spPr>
             <a:xfrm>
-              <a:off x="2339589" y="2583293"/>
+              <a:off x="6045934" y="2583293"/>
               <a:ext cx="0" cy="3139848"/>
             </a:xfrm>
             <a:custGeom>
@@ -2873,7 +2873,7 @@
           </p:nvSpPr>
           <p:spPr>
             <a:xfrm>
-              <a:off x="4192761" y="2583293"/>
+              <a:off x="7899106" y="2583293"/>
               <a:ext cx="0" cy="3139848"/>
             </a:xfrm>
             <a:custGeom>
@@ -2916,28 +2916,88 @@
           </p:nvSpPr>
           <p:spPr>
             <a:xfrm>
-              <a:off x="6045934" y="2583293"/>
-              <a:ext cx="0" cy="3139848"/>
+              <a:off x="1320344" y="3510515"/>
+              <a:ext cx="6949396" cy="1947405"/>
             </a:xfrm>
             <a:custGeom>
               <a:avLst/>
               <a:pathLst>
-                <a:path w="0" h="3139848">
+                <a:path w="6949396" h="1947405">
                   <a:moveTo>
-                    <a:pt x="0" y="3139848"/>
+                    <a:pt x="0" y="1947405"/>
                   </a:moveTo>
                   <a:lnTo>
-                    <a:pt x="0" y="0"/>
-                  </a:lnTo>
-                  <a:lnTo>
-                    <a:pt x="0" y="0"/>
+                    <a:pt x="185317" y="1947405"/>
+                  </a:lnTo>
+                  <a:lnTo>
+                    <a:pt x="185317" y="1484746"/>
+                  </a:lnTo>
+                  <a:lnTo>
+                    <a:pt x="277975" y="1484746"/>
+                  </a:lnTo>
+                  <a:lnTo>
+                    <a:pt x="277975" y="1343855"/>
+                  </a:lnTo>
+                  <a:lnTo>
+                    <a:pt x="370634" y="1343855"/>
+                  </a:lnTo>
+                  <a:lnTo>
+                    <a:pt x="370634" y="1204054"/>
+                  </a:lnTo>
+                  <a:lnTo>
+                    <a:pt x="1482537" y="1204054"/>
+                  </a:lnTo>
+                  <a:lnTo>
+                    <a:pt x="1482537" y="1068076"/>
+                  </a:lnTo>
+                  <a:lnTo>
+                    <a:pt x="1945831" y="1068076"/>
+                  </a:lnTo>
+                  <a:lnTo>
+                    <a:pt x="1945831" y="931039"/>
+                  </a:lnTo>
+                  <a:lnTo>
+                    <a:pt x="2223806" y="931039"/>
+                  </a:lnTo>
+                  <a:lnTo>
+                    <a:pt x="2223806" y="795190"/>
+                  </a:lnTo>
+                  <a:lnTo>
+                    <a:pt x="3057734" y="795190"/>
+                  </a:lnTo>
+                  <a:lnTo>
+                    <a:pt x="3057734" y="518494"/>
+                  </a:lnTo>
+                  <a:lnTo>
+                    <a:pt x="3335710" y="518494"/>
+                  </a:lnTo>
+                  <a:lnTo>
+                    <a:pt x="3335710" y="384116"/>
+                  </a:lnTo>
+                  <a:lnTo>
+                    <a:pt x="6300786" y="384116"/>
+                  </a:lnTo>
+                  <a:lnTo>
+                    <a:pt x="6300786" y="253339"/>
+                  </a:lnTo>
+                  <a:lnTo>
+                    <a:pt x="6578762" y="253339"/>
+                  </a:lnTo>
+                  <a:lnTo>
+                    <a:pt x="6578762" y="125858"/>
+                  </a:lnTo>
+                  <a:lnTo>
+                    <a:pt x="6949396" y="125858"/>
+                  </a:lnTo>
+                  <a:lnTo>
+                    <a:pt x="6949396" y="0"/>
                   </a:lnTo>
                 </a:path>
               </a:pathLst>
             </a:custGeom>
-            <a:ln w="13550" cap="flat">
+            <a:ln w="27101" cap="flat">
               <a:solidFill>
-                <a:srgbClr val="EBEBEB">
+                <a:srgbClr val="1F78B4">
                   <a:alpha val="100000"/>
                 </a:srgbClr>
               </a:solidFill>
@@ -2959,224 +3019,78 @@
           </p:nvSpPr>
           <p:spPr>
             <a:xfrm>
-              <a:off x="7899106" y="2583293"/>
-              <a:ext cx="0" cy="3139848"/>
+              <a:off x="1320344" y="2861938"/>
+              <a:ext cx="6949396" cy="2544628"/>
             </a:xfrm>
             <a:custGeom>
               <a:avLst/>
               <a:pathLst>
-                <a:path w="0" h="3139848">
+                <a:path w="6949396" h="2544628">
                   <a:moveTo>
-                    <a:pt x="0" y="3139848"/>
+                    <a:pt x="0" y="2544628"/>
                   </a:moveTo>
                   <a:lnTo>
-                    <a:pt x="0" y="0"/>
-                  </a:lnTo>
-                  <a:lnTo>
-                    <a:pt x="0" y="0"/>
-                  </a:lnTo>
-                </a:path>
-              </a:pathLst>
-            </a:custGeom>
-            <a:ln w="13550" cap="flat">
-              <a:solidFill>
-                <a:srgbClr val="EBEBEB">
-                  <a:alpha val="100000"/>
-                </a:srgbClr>
-              </a:solidFill>
-              <a:prstDash val="solid"/>
-              <a:round/>
-            </a:ln>
-          </p:spPr>
-          <p:txBody>
-            <a:bodyPr/>
-            <a:lstStyle/>
-            <a:p/>
-          </p:txBody>
-        </p:sp>
-        <p:sp>
-          <p:nvSpPr>
-            <p:cNvPr id="21" name="pl21"/>
-            <p:cNvSpPr/>
-            <p:nvPr/>
-          </p:nvSpPr>
-          <p:spPr>
-            <a:xfrm>
-              <a:off x="1320344" y="4384373"/>
-              <a:ext cx="6949396" cy="1125401"/>
-            </a:xfrm>
-            <a:custGeom>
-              <a:avLst/>
-              <a:pathLst>
-                <a:path w="6949396" h="1125401">
-                  <a:moveTo>
-                    <a:pt x="0" y="1125401"/>
-                  </a:moveTo>
-                  <a:lnTo>
-                    <a:pt x="185317" y="1125401"/>
-                  </a:lnTo>
-                  <a:lnTo>
-                    <a:pt x="185317" y="845409"/>
-                  </a:lnTo>
-                  <a:lnTo>
-                    <a:pt x="277975" y="845409"/>
-                  </a:lnTo>
-                  <a:lnTo>
-                    <a:pt x="277975" y="771656"/>
-                  </a:lnTo>
-                  <a:lnTo>
-                    <a:pt x="370634" y="771656"/>
-                  </a:lnTo>
-                  <a:lnTo>
-                    <a:pt x="370634" y="696579"/>
-                  </a:lnTo>
-                  <a:lnTo>
-                    <a:pt x="1482537" y="696579"/>
-                  </a:lnTo>
-                  <a:lnTo>
-                    <a:pt x="1482537" y="620903"/>
-                  </a:lnTo>
-                  <a:lnTo>
-                    <a:pt x="1945831" y="620903"/>
-                  </a:lnTo>
-                  <a:lnTo>
-                    <a:pt x="1945831" y="544144"/>
-                  </a:lnTo>
-                  <a:lnTo>
-                    <a:pt x="2223806" y="544144"/>
-                  </a:lnTo>
-                  <a:lnTo>
-                    <a:pt x="2223806" y="467006"/>
-                  </a:lnTo>
-                  <a:lnTo>
-                    <a:pt x="3057734" y="467006"/>
-                  </a:lnTo>
-                  <a:lnTo>
-                    <a:pt x="3057734" y="312905"/>
-                  </a:lnTo>
-                  <a:lnTo>
-                    <a:pt x="3335710" y="312905"/>
-                  </a:lnTo>
-                  <a:lnTo>
-                    <a:pt x="3335710" y="235357"/>
-                  </a:lnTo>
-                  <a:lnTo>
-                    <a:pt x="6300786" y="235357"/>
-                  </a:lnTo>
-                  <a:lnTo>
-                    <a:pt x="6300786" y="158190"/>
-                  </a:lnTo>
-                  <a:lnTo>
-                    <a:pt x="6578762" y="158190"/>
-                  </a:lnTo>
-                  <a:lnTo>
-                    <a:pt x="6578762" y="79519"/>
-                  </a:lnTo>
-                  <a:lnTo>
-                    <a:pt x="6949396" y="79519"/>
-                  </a:lnTo>
-                  <a:lnTo>
-                    <a:pt x="6949396" y="0"/>
-                  </a:lnTo>
-                </a:path>
-              </a:pathLst>
-            </a:custGeom>
-            <a:ln w="27101" cap="flat">
-              <a:solidFill>
-                <a:srgbClr val="1F78B4">
-                  <a:alpha val="100000"/>
-                </a:srgbClr>
-              </a:solidFill>
-              <a:prstDash val="solid"/>
-              <a:round/>
-            </a:ln>
-          </p:spPr>
-          <p:txBody>
-            <a:bodyPr/>
-            <a:lstStyle/>
-            <a:p/>
-          </p:txBody>
-        </p:sp>
-        <p:sp>
-          <p:nvSpPr>
-            <p:cNvPr id="22" name="pl22"/>
-            <p:cNvSpPr/>
-            <p:nvPr/>
-          </p:nvSpPr>
-          <p:spPr>
-            <a:xfrm>
-              <a:off x="1320344" y="2861938"/>
-              <a:ext cx="6949396" cy="2545918"/>
-            </a:xfrm>
-            <a:custGeom>
-              <a:avLst/>
-              <a:pathLst>
-                <a:path w="6949396" h="2545918">
-                  <a:moveTo>
-                    <a:pt x="0" y="2545918"/>
-                  </a:moveTo>
-                  <a:lnTo>
-                    <a:pt x="185317" y="2545918"/>
-                  </a:lnTo>
-                  <a:lnTo>
-                    <a:pt x="185317" y="1877244"/>
-                  </a:lnTo>
-                  <a:lnTo>
-                    <a:pt x="277975" y="1877244"/>
-                  </a:lnTo>
-                  <a:lnTo>
-                    <a:pt x="277975" y="1705101"/>
-                  </a:lnTo>
-                  <a:lnTo>
-                    <a:pt x="370634" y="1705101"/>
-                  </a:lnTo>
-                  <a:lnTo>
-                    <a:pt x="370634" y="1531551"/>
-                  </a:lnTo>
-                  <a:lnTo>
-                    <a:pt x="1482537" y="1531551"/>
-                  </a:lnTo>
-                  <a:lnTo>
-                    <a:pt x="1482537" y="1358323"/>
-                  </a:lnTo>
-                  <a:lnTo>
-                    <a:pt x="1945831" y="1358323"/>
-                  </a:lnTo>
-                  <a:lnTo>
-                    <a:pt x="1945831" y="1184352"/>
-                  </a:lnTo>
-                  <a:lnTo>
-                    <a:pt x="2223806" y="1184352"/>
-                  </a:lnTo>
-                  <a:lnTo>
-                    <a:pt x="2223806" y="1011269"/>
-                  </a:lnTo>
-                  <a:lnTo>
-                    <a:pt x="3057734" y="1011269"/>
-                  </a:lnTo>
-                  <a:lnTo>
-                    <a:pt x="3057734" y="670683"/>
-                  </a:lnTo>
-                  <a:lnTo>
-                    <a:pt x="3335710" y="670683"/>
-                  </a:lnTo>
-                  <a:lnTo>
-                    <a:pt x="3335710" y="501879"/>
-                  </a:lnTo>
-                  <a:lnTo>
-                    <a:pt x="6300786" y="501879"/>
-                  </a:lnTo>
-                  <a:lnTo>
-                    <a:pt x="6300786" y="335606"/>
-                  </a:lnTo>
-                  <a:lnTo>
-                    <a:pt x="6578762" y="335606"/>
-                  </a:lnTo>
-                  <a:lnTo>
-                    <a:pt x="6578762" y="167826"/>
-                  </a:lnTo>
-                  <a:lnTo>
-                    <a:pt x="6949396" y="167826"/>
+                    <a:pt x="185317" y="2544628"/>
+                  </a:lnTo>
+                  <a:lnTo>
+                    <a:pt x="185317" y="1908866"/>
+                  </a:lnTo>
+                  <a:lnTo>
+                    <a:pt x="277975" y="1908866"/>
+                  </a:lnTo>
+                  <a:lnTo>
+                    <a:pt x="277975" y="1720542"/>
+                  </a:lnTo>
+                  <a:lnTo>
+                    <a:pt x="370634" y="1720542"/>
+                  </a:lnTo>
+                  <a:lnTo>
+                    <a:pt x="370634" y="1535617"/>
+                  </a:lnTo>
+                  <a:lnTo>
+                    <a:pt x="1482537" y="1535617"/>
+                  </a:lnTo>
+                  <a:lnTo>
+                    <a:pt x="1482537" y="1357397"/>
+                  </a:lnTo>
+                  <a:lnTo>
+                    <a:pt x="1945831" y="1357397"/>
+                  </a:lnTo>
+                  <a:lnTo>
+                    <a:pt x="1945831" y="1179264"/>
+                  </a:lnTo>
+                  <a:lnTo>
+                    <a:pt x="2223806" y="1179264"/>
+                  </a:lnTo>
+                  <a:lnTo>
+                    <a:pt x="2223806" y="1003999"/>
+                  </a:lnTo>
+                  <a:lnTo>
+                    <a:pt x="3057734" y="1003999"/>
+                  </a:lnTo>
+                  <a:lnTo>
+                    <a:pt x="3057734" y="650666"/>
+                  </a:lnTo>
+                  <a:lnTo>
+                    <a:pt x="3335710" y="650666"/>
+                  </a:lnTo>
+                  <a:lnTo>
+                    <a:pt x="3335710" y="480675"/>
+                  </a:lnTo>
+                  <a:lnTo>
+                    <a:pt x="6300786" y="480675"/>
+                  </a:lnTo>
+                  <a:lnTo>
+                    <a:pt x="6300786" y="316176"/>
+                  </a:lnTo>
+                  <a:lnTo>
+                    <a:pt x="6578762" y="316176"/>
+                  </a:lnTo>
+                  <a:lnTo>
+                    <a:pt x="6578762" y="156675"/>
+                  </a:lnTo>
+                  <a:lnTo>
+                    <a:pt x="6949396" y="156675"/>
                   </a:lnTo>
                   <a:lnTo>
                     <a:pt x="6949396" y="0"/>
@@ -3202,7 +3116,7 @@
         </p:sp>
         <p:sp>
           <p:nvSpPr>
-            <p:cNvPr id="23" name="tx23"/>
+            <p:cNvPr id="21" name="tx21"/>
             <p:cNvSpPr/>
             <p:nvPr/>
           </p:nvSpPr>
@@ -3248,13 +3162,13 @@
         </p:sp>
         <p:sp>
           <p:nvSpPr>
-            <p:cNvPr id="24" name="tx24"/>
+            <p:cNvPr id="22" name="tx22"/>
             <p:cNvSpPr/>
             <p:nvPr/>
           </p:nvSpPr>
           <p:spPr>
             <a:xfrm>
-              <a:off x="692708" y="4849407"/>
+              <a:off x="692708" y="4635477"/>
               <a:ext cx="217535" cy="80101"/>
             </a:xfrm>
             <a:prstGeom prst="rect">
@@ -3294,13 +3208,13 @@
         </p:sp>
         <p:sp>
           <p:nvSpPr>
-            <p:cNvPr id="25" name="tx25"/>
+            <p:cNvPr id="23" name="tx23"/>
             <p:cNvSpPr/>
             <p:nvPr/>
           </p:nvSpPr>
           <p:spPr>
             <a:xfrm>
-              <a:off x="692708" y="4158442"/>
+              <a:off x="692708" y="3730582"/>
               <a:ext cx="217535" cy="80101"/>
             </a:xfrm>
             <a:prstGeom prst="rect">
@@ -3340,13 +3254,13 @@
         </p:sp>
         <p:sp>
           <p:nvSpPr>
-            <p:cNvPr id="26" name="tx26"/>
+            <p:cNvPr id="24" name="tx24"/>
             <p:cNvSpPr/>
             <p:nvPr/>
           </p:nvSpPr>
           <p:spPr>
             <a:xfrm>
-              <a:off x="692708" y="3467478"/>
+              <a:off x="692708" y="2825688"/>
               <a:ext cx="217535" cy="80101"/>
             </a:xfrm>
             <a:prstGeom prst="rect">
@@ -3386,53 +3300,7 @@
         </p:sp>
         <p:sp>
           <p:nvSpPr>
-            <p:cNvPr id="27" name="tx27"/>
-            <p:cNvSpPr/>
-            <p:nvPr/>
-          </p:nvSpPr>
-          <p:spPr>
-            <a:xfrm>
-              <a:off x="692708" y="2776513"/>
-              <a:ext cx="217535" cy="80101"/>
-            </a:xfrm>
-            <a:prstGeom prst="rect">
-              <a:avLst/>
-            </a:prstGeom>
-            <a:noFill/>
-          </p:spPr>
-          <p:txBody>
-            <a:bodyPr lIns="0" rIns="0" tIns="0" bIns="0" anchorCtr="1" anchor="ctr" wrap="none"/>
-            <a:lstStyle/>
-            <a:p>
-              <a:pPr algn="l" marL="0" marR="0" indent="0">
-                <a:lnSpc>
-                  <a:spcPts val="880"/>
-                </a:lnSpc>
-                <a:spcBef>
-                  <a:spcPts val="0"/>
-                </a:spcBef>
-                <a:spcAft>
-                  <a:spcPts val="0"/>
-                </a:spcAft>
-              </a:pPr>
-              <a:r>
-                <a:rPr sz="880">
-                  <a:solidFill>
-                    <a:srgbClr val="4D4D4D">
-                      <a:alpha val="100000"/>
-                    </a:srgbClr>
-                  </a:solidFill>
-                  <a:latin typeface="Helvetica"/>
-                  <a:cs typeface="Helvetica"/>
-                </a:rPr>
-                <a:t>0.20</a:t>
-              </a:r>
-            </a:p>
-          </p:txBody>
-        </p:sp>
-        <p:sp>
-          <p:nvSpPr>
-            <p:cNvPr id="28" name="tx28"/>
+            <p:cNvPr id="25" name="tx25"/>
             <p:cNvSpPr/>
             <p:nvPr/>
           </p:nvSpPr>
@@ -3478,7 +3346,7 @@
         </p:sp>
         <p:sp>
           <p:nvSpPr>
-            <p:cNvPr id="29" name="tx29"/>
+            <p:cNvPr id="26" name="tx26"/>
             <p:cNvSpPr/>
             <p:nvPr/>
           </p:nvSpPr>
@@ -3524,7 +3392,7 @@
         </p:sp>
         <p:sp>
           <p:nvSpPr>
-            <p:cNvPr id="30" name="tx30"/>
+            <p:cNvPr id="27" name="tx27"/>
             <p:cNvSpPr/>
             <p:nvPr/>
           </p:nvSpPr>
@@ -3570,7 +3438,7 @@
         </p:sp>
         <p:sp>
           <p:nvSpPr>
-            <p:cNvPr id="31" name="tx31"/>
+            <p:cNvPr id="28" name="tx28"/>
             <p:cNvSpPr/>
             <p:nvPr/>
           </p:nvSpPr>
@@ -3616,7 +3484,7 @@
         </p:sp>
         <p:sp>
           <p:nvSpPr>
-            <p:cNvPr id="32" name="tx32"/>
+            <p:cNvPr id="29" name="tx29"/>
             <p:cNvSpPr/>
             <p:nvPr/>
           </p:nvSpPr>
@@ -3662,7 +3530,7 @@
         </p:sp>
         <p:sp>
           <p:nvSpPr>
-            <p:cNvPr id="33" name="tx33"/>
+            <p:cNvPr id="30" name="tx30"/>
             <p:cNvSpPr/>
             <p:nvPr/>
           </p:nvSpPr>
@@ -3708,7 +3576,7 @@
         </p:sp>
         <p:sp>
           <p:nvSpPr>
-            <p:cNvPr id="34" name="pl34"/>
+            <p:cNvPr id="31" name="pl31"/>
             <p:cNvSpPr/>
             <p:nvPr/>
           </p:nvSpPr>
@@ -3748,7 +3616,7 @@
         </p:sp>
         <p:sp>
           <p:nvSpPr>
-            <p:cNvPr id="35" name="pl35"/>
+            <p:cNvPr id="32" name="pl32"/>
             <p:cNvSpPr/>
             <p:nvPr/>
           </p:nvSpPr>
@@ -3788,7 +3656,7 @@
         </p:sp>
         <p:sp>
           <p:nvSpPr>
-            <p:cNvPr id="36" name="tx36"/>
+            <p:cNvPr id="33" name="tx33"/>
             <p:cNvSpPr/>
             <p:nvPr/>
           </p:nvSpPr>
@@ -3834,7 +3702,7 @@
         </p:sp>
         <p:sp>
           <p:nvSpPr>
-            <p:cNvPr id="37" name="tx37"/>
+            <p:cNvPr id="34" name="tx34"/>
             <p:cNvSpPr/>
             <p:nvPr/>
           </p:nvSpPr>
@@ -3880,7 +3748,7 @@
         </p:sp>
         <p:sp>
           <p:nvSpPr>
-            <p:cNvPr id="38" name="tx38"/>
+            <p:cNvPr id="35" name="tx35"/>
             <p:cNvSpPr/>
             <p:nvPr/>
           </p:nvSpPr>
@@ -3919,14 +3787,14 @@
                   <a:latin typeface="Helvetica"/>
                   <a:cs typeface="Helvetica"/>
                 </a:rPr>
-                <a:t>Discrep &gt;= +25 vs &lt;+25: subHR = 2.45 (95% CI 0.76-7.96), p = 0.135</a:t>
+                <a:t>Discrep &gt;= +25 vs &lt;+25: subHR = 1.43 (95% CI 0.50-4.13), p = 0.508</a:t>
               </a:r>
             </a:p>
           </p:txBody>
         </p:sp>
         <p:sp>
           <p:nvSpPr>
-            <p:cNvPr id="39" name="tx39"/>
+            <p:cNvPr id="36" name="tx36"/>
             <p:cNvSpPr/>
             <p:nvPr/>
           </p:nvSpPr>

--- a/docs/plots/carbo/jx_carbo_adjcif_grade3.pptx
+++ b/docs/plots/carbo/jx_carbo_adjcif_grade3.pptx
@@ -2271,26 +2271,26 @@
           </p:nvSpPr>
           <p:spPr>
             <a:xfrm>
-              <a:off x="972874" y="5127975"/>
-              <a:ext cx="7644336" cy="0"/>
+              <a:off x="1113155" y="5076797"/>
+              <a:ext cx="7485076" cy="0"/>
             </a:xfrm>
             <a:custGeom>
               <a:avLst/>
               <a:pathLst>
-                <a:path w="7644336" h="0">
+                <a:path w="7485076" h="0">
                   <a:moveTo>
                     <a:pt x="0" y="0"/>
                   </a:moveTo>
                   <a:lnTo>
-                    <a:pt x="7644336" y="0"/>
-                  </a:lnTo>
-                  <a:lnTo>
-                    <a:pt x="7644336" y="0"/>
+                    <a:pt x="7485076" y="0"/>
+                  </a:lnTo>
+                  <a:lnTo>
+                    <a:pt x="7485076" y="0"/>
                   </a:lnTo>
                 </a:path>
               </a:pathLst>
             </a:custGeom>
-            <a:ln w="6775" cap="flat">
+            <a:ln w="8623" cap="flat">
               <a:solidFill>
                 <a:srgbClr val="EBEBEB">
                   <a:alpha val="100000"/>
@@ -2314,26 +2314,26 @@
           </p:nvSpPr>
           <p:spPr>
             <a:xfrm>
-              <a:off x="972874" y="4223080"/>
-              <a:ext cx="7644336" cy="0"/>
+              <a:off x="1113155" y="4261081"/>
+              <a:ext cx="7485076" cy="0"/>
             </a:xfrm>
             <a:custGeom>
               <a:avLst/>
               <a:pathLst>
-                <a:path w="7644336" h="0">
+                <a:path w="7485076" h="0">
                   <a:moveTo>
                     <a:pt x="0" y="0"/>
                   </a:moveTo>
                   <a:lnTo>
-                    <a:pt x="7644336" y="0"/>
-                  </a:lnTo>
-                  <a:lnTo>
-                    <a:pt x="7644336" y="0"/>
+                    <a:pt x="7485076" y="0"/>
+                  </a:lnTo>
+                  <a:lnTo>
+                    <a:pt x="7485076" y="0"/>
                   </a:lnTo>
                 </a:path>
               </a:pathLst>
             </a:custGeom>
-            <a:ln w="6775" cap="flat">
+            <a:ln w="8623" cap="flat">
               <a:solidFill>
                 <a:srgbClr val="EBEBEB">
                   <a:alpha val="100000"/>
@@ -2357,26 +2357,26 @@
           </p:nvSpPr>
           <p:spPr>
             <a:xfrm>
-              <a:off x="972874" y="3318186"/>
-              <a:ext cx="7644336" cy="0"/>
+              <a:off x="1113155" y="3445365"/>
+              <a:ext cx="7485076" cy="0"/>
             </a:xfrm>
             <a:custGeom>
               <a:avLst/>
               <a:pathLst>
-                <a:path w="7644336" h="0">
+                <a:path w="7485076" h="0">
                   <a:moveTo>
                     <a:pt x="0" y="0"/>
                   </a:moveTo>
                   <a:lnTo>
-                    <a:pt x="7644336" y="0"/>
-                  </a:lnTo>
-                  <a:lnTo>
-                    <a:pt x="7644336" y="0"/>
+                    <a:pt x="7485076" y="0"/>
+                  </a:lnTo>
+                  <a:lnTo>
+                    <a:pt x="7485076" y="0"/>
                   </a:lnTo>
                 </a:path>
               </a:pathLst>
             </a:custGeom>
-            <a:ln w="6775" cap="flat">
+            <a:ln w="8623" cap="flat">
               <a:solidFill>
                 <a:srgbClr val="EBEBEB">
                   <a:alpha val="100000"/>
@@ -2400,15 +2400,15 @@
           </p:nvSpPr>
           <p:spPr>
             <a:xfrm>
-              <a:off x="1413002" y="2583293"/>
-              <a:ext cx="0" cy="3139848"/>
+              <a:off x="1544114" y="2782896"/>
+              <a:ext cx="0" cy="2830414"/>
             </a:xfrm>
             <a:custGeom>
               <a:avLst/>
               <a:pathLst>
-                <a:path w="0" h="3139848">
+                <a:path w="0" h="2830414">
                   <a:moveTo>
-                    <a:pt x="0" y="3139848"/>
+                    <a:pt x="0" y="2830414"/>
                   </a:moveTo>
                   <a:lnTo>
                     <a:pt x="0" y="0"/>
@@ -2419,7 +2419,7 @@
                 </a:path>
               </a:pathLst>
             </a:custGeom>
-            <a:ln w="6775" cap="flat">
+            <a:ln w="8623" cap="flat">
               <a:solidFill>
                 <a:srgbClr val="EBEBEB">
                   <a:alpha val="100000"/>
@@ -2443,15 +2443,15 @@
           </p:nvSpPr>
           <p:spPr>
             <a:xfrm>
-              <a:off x="3266175" y="2583293"/>
-              <a:ext cx="0" cy="3139848"/>
+              <a:off x="3358678" y="2782896"/>
+              <a:ext cx="0" cy="2830414"/>
             </a:xfrm>
             <a:custGeom>
               <a:avLst/>
               <a:pathLst>
-                <a:path w="0" h="3139848">
+                <a:path w="0" h="2830414">
                   <a:moveTo>
-                    <a:pt x="0" y="3139848"/>
+                    <a:pt x="0" y="2830414"/>
                   </a:moveTo>
                   <a:lnTo>
                     <a:pt x="0" y="0"/>
@@ -2462,7 +2462,7 @@
                 </a:path>
               </a:pathLst>
             </a:custGeom>
-            <a:ln w="6775" cap="flat">
+            <a:ln w="8623" cap="flat">
               <a:solidFill>
                 <a:srgbClr val="EBEBEB">
                   <a:alpha val="100000"/>
@@ -2486,15 +2486,15 @@
           </p:nvSpPr>
           <p:spPr>
             <a:xfrm>
-              <a:off x="5119347" y="2583293"/>
-              <a:ext cx="0" cy="3139848"/>
+              <a:off x="5173242" y="2782896"/>
+              <a:ext cx="0" cy="2830414"/>
             </a:xfrm>
             <a:custGeom>
               <a:avLst/>
               <a:pathLst>
-                <a:path w="0" h="3139848">
+                <a:path w="0" h="2830414">
                   <a:moveTo>
-                    <a:pt x="0" y="3139848"/>
+                    <a:pt x="0" y="2830414"/>
                   </a:moveTo>
                   <a:lnTo>
                     <a:pt x="0" y="0"/>
@@ -2505,7 +2505,7 @@
                 </a:path>
               </a:pathLst>
             </a:custGeom>
-            <a:ln w="6775" cap="flat">
+            <a:ln w="8623" cap="flat">
               <a:solidFill>
                 <a:srgbClr val="EBEBEB">
                   <a:alpha val="100000"/>
@@ -2529,15 +2529,15 @@
           </p:nvSpPr>
           <p:spPr>
             <a:xfrm>
-              <a:off x="6972520" y="2583293"/>
-              <a:ext cx="0" cy="3139848"/>
+              <a:off x="6987806" y="2782896"/>
+              <a:ext cx="0" cy="2830414"/>
             </a:xfrm>
             <a:custGeom>
               <a:avLst/>
               <a:pathLst>
-                <a:path w="0" h="3139848">
+                <a:path w="0" h="2830414">
                   <a:moveTo>
-                    <a:pt x="0" y="3139848"/>
+                    <a:pt x="0" y="2830414"/>
                   </a:moveTo>
                   <a:lnTo>
                     <a:pt x="0" y="0"/>
@@ -2548,7 +2548,7 @@
                 </a:path>
               </a:pathLst>
             </a:custGeom>
-            <a:ln w="6775" cap="flat">
+            <a:ln w="8623" cap="flat">
               <a:solidFill>
                 <a:srgbClr val="EBEBEB">
                   <a:alpha val="100000"/>
@@ -2572,26 +2572,26 @@
           </p:nvSpPr>
           <p:spPr>
             <a:xfrm>
-              <a:off x="972874" y="5580422"/>
-              <a:ext cx="7644336" cy="0"/>
+              <a:off x="1113155" y="5484655"/>
+              <a:ext cx="7485076" cy="0"/>
             </a:xfrm>
             <a:custGeom>
               <a:avLst/>
               <a:pathLst>
-                <a:path w="7644336" h="0">
+                <a:path w="7485076" h="0">
                   <a:moveTo>
                     <a:pt x="0" y="0"/>
                   </a:moveTo>
                   <a:lnTo>
-                    <a:pt x="7644336" y="0"/>
-                  </a:lnTo>
-                  <a:lnTo>
-                    <a:pt x="7644336" y="0"/>
+                    <a:pt x="7485076" y="0"/>
+                  </a:lnTo>
+                  <a:lnTo>
+                    <a:pt x="7485076" y="0"/>
                   </a:lnTo>
                 </a:path>
               </a:pathLst>
             </a:custGeom>
-            <a:ln w="13550" cap="flat">
+            <a:ln w="17246" cap="flat">
               <a:solidFill>
                 <a:srgbClr val="EBEBEB">
                   <a:alpha val="100000"/>
@@ -2615,26 +2615,26 @@
           </p:nvSpPr>
           <p:spPr>
             <a:xfrm>
-              <a:off x="972874" y="4675527"/>
-              <a:ext cx="7644336" cy="0"/>
+              <a:off x="1113155" y="4668939"/>
+              <a:ext cx="7485076" cy="0"/>
             </a:xfrm>
             <a:custGeom>
               <a:avLst/>
               <a:pathLst>
-                <a:path w="7644336" h="0">
+                <a:path w="7485076" h="0">
                   <a:moveTo>
                     <a:pt x="0" y="0"/>
                   </a:moveTo>
                   <a:lnTo>
-                    <a:pt x="7644336" y="0"/>
-                  </a:lnTo>
-                  <a:lnTo>
-                    <a:pt x="7644336" y="0"/>
+                    <a:pt x="7485076" y="0"/>
+                  </a:lnTo>
+                  <a:lnTo>
+                    <a:pt x="7485076" y="0"/>
                   </a:lnTo>
                 </a:path>
               </a:pathLst>
             </a:custGeom>
-            <a:ln w="13550" cap="flat">
+            <a:ln w="17246" cap="flat">
               <a:solidFill>
                 <a:srgbClr val="EBEBEB">
                   <a:alpha val="100000"/>
@@ -2658,26 +2658,26 @@
           </p:nvSpPr>
           <p:spPr>
             <a:xfrm>
-              <a:off x="972874" y="3770633"/>
-              <a:ext cx="7644336" cy="0"/>
+              <a:off x="1113155" y="3853223"/>
+              <a:ext cx="7485076" cy="0"/>
             </a:xfrm>
             <a:custGeom>
               <a:avLst/>
               <a:pathLst>
-                <a:path w="7644336" h="0">
+                <a:path w="7485076" h="0">
                   <a:moveTo>
                     <a:pt x="0" y="0"/>
                   </a:moveTo>
                   <a:lnTo>
-                    <a:pt x="7644336" y="0"/>
-                  </a:lnTo>
-                  <a:lnTo>
-                    <a:pt x="7644336" y="0"/>
+                    <a:pt x="7485076" y="0"/>
+                  </a:lnTo>
+                  <a:lnTo>
+                    <a:pt x="7485076" y="0"/>
                   </a:lnTo>
                 </a:path>
               </a:pathLst>
             </a:custGeom>
-            <a:ln w="13550" cap="flat">
+            <a:ln w="17246" cap="flat">
               <a:solidFill>
                 <a:srgbClr val="EBEBEB">
                   <a:alpha val="100000"/>
@@ -2701,26 +2701,26 @@
           </p:nvSpPr>
           <p:spPr>
             <a:xfrm>
-              <a:off x="972874" y="2865739"/>
-              <a:ext cx="7644336" cy="0"/>
+              <a:off x="1113155" y="3037506"/>
+              <a:ext cx="7485076" cy="0"/>
             </a:xfrm>
             <a:custGeom>
               <a:avLst/>
               <a:pathLst>
-                <a:path w="7644336" h="0">
+                <a:path w="7485076" h="0">
                   <a:moveTo>
                     <a:pt x="0" y="0"/>
                   </a:moveTo>
                   <a:lnTo>
-                    <a:pt x="7644336" y="0"/>
-                  </a:lnTo>
-                  <a:lnTo>
-                    <a:pt x="7644336" y="0"/>
+                    <a:pt x="7485076" y="0"/>
+                  </a:lnTo>
+                  <a:lnTo>
+                    <a:pt x="7485076" y="0"/>
                   </a:lnTo>
                 </a:path>
               </a:pathLst>
             </a:custGeom>
-            <a:ln w="13550" cap="flat">
+            <a:ln w="17246" cap="flat">
               <a:solidFill>
                 <a:srgbClr val="EBEBEB">
                   <a:alpha val="100000"/>
@@ -2744,15 +2744,15 @@
           </p:nvSpPr>
           <p:spPr>
             <a:xfrm>
-              <a:off x="2339589" y="2583293"/>
-              <a:ext cx="0" cy="3139848"/>
+              <a:off x="2451396" y="2782896"/>
+              <a:ext cx="0" cy="2830414"/>
             </a:xfrm>
             <a:custGeom>
               <a:avLst/>
               <a:pathLst>
-                <a:path w="0" h="3139848">
+                <a:path w="0" h="2830414">
                   <a:moveTo>
-                    <a:pt x="0" y="3139848"/>
+                    <a:pt x="0" y="2830414"/>
                   </a:moveTo>
                   <a:lnTo>
                     <a:pt x="0" y="0"/>
@@ -2763,7 +2763,7 @@
                 </a:path>
               </a:pathLst>
             </a:custGeom>
-            <a:ln w="13550" cap="flat">
+            <a:ln w="17246" cap="flat">
               <a:solidFill>
                 <a:srgbClr val="EBEBEB">
                   <a:alpha val="100000"/>
@@ -2787,15 +2787,15 @@
           </p:nvSpPr>
           <p:spPr>
             <a:xfrm>
-              <a:off x="4192761" y="2583293"/>
-              <a:ext cx="0" cy="3139848"/>
+              <a:off x="4265960" y="2782896"/>
+              <a:ext cx="0" cy="2830414"/>
             </a:xfrm>
             <a:custGeom>
               <a:avLst/>
               <a:pathLst>
-                <a:path w="0" h="3139848">
+                <a:path w="0" h="2830414">
                   <a:moveTo>
-                    <a:pt x="0" y="3139848"/>
+                    <a:pt x="0" y="2830414"/>
                   </a:moveTo>
                   <a:lnTo>
                     <a:pt x="0" y="0"/>
@@ -2806,7 +2806,7 @@
                 </a:path>
               </a:pathLst>
             </a:custGeom>
-            <a:ln w="13550" cap="flat">
+            <a:ln w="17246" cap="flat">
               <a:solidFill>
                 <a:srgbClr val="EBEBEB">
                   <a:alpha val="100000"/>
@@ -2830,15 +2830,15 @@
           </p:nvSpPr>
           <p:spPr>
             <a:xfrm>
-              <a:off x="6045934" y="2583293"/>
-              <a:ext cx="0" cy="3139848"/>
+              <a:off x="6080524" y="2782896"/>
+              <a:ext cx="0" cy="2830414"/>
             </a:xfrm>
             <a:custGeom>
               <a:avLst/>
               <a:pathLst>
-                <a:path w="0" h="3139848">
+                <a:path w="0" h="2830414">
                   <a:moveTo>
-                    <a:pt x="0" y="3139848"/>
+                    <a:pt x="0" y="2830414"/>
                   </a:moveTo>
                   <a:lnTo>
                     <a:pt x="0" y="0"/>
@@ -2849,7 +2849,7 @@
                 </a:path>
               </a:pathLst>
             </a:custGeom>
-            <a:ln w="13550" cap="flat">
+            <a:ln w="17246" cap="flat">
               <a:solidFill>
                 <a:srgbClr val="EBEBEB">
                   <a:alpha val="100000"/>
@@ -2873,15 +2873,15 @@
           </p:nvSpPr>
           <p:spPr>
             <a:xfrm>
-              <a:off x="7899106" y="2583293"/>
-              <a:ext cx="0" cy="3139848"/>
+              <a:off x="7895088" y="2782896"/>
+              <a:ext cx="0" cy="2830414"/>
             </a:xfrm>
             <a:custGeom>
               <a:avLst/>
               <a:pathLst>
-                <a:path w="0" h="3139848">
+                <a:path w="0" h="2830414">
                   <a:moveTo>
-                    <a:pt x="0" y="3139848"/>
+                    <a:pt x="0" y="2830414"/>
                   </a:moveTo>
                   <a:lnTo>
                     <a:pt x="0" y="0"/>
@@ -2892,7 +2892,7 @@
                 </a:path>
               </a:pathLst>
             </a:custGeom>
-            <a:ln w="13550" cap="flat">
+            <a:ln w="17246" cap="flat">
               <a:solidFill>
                 <a:srgbClr val="EBEBEB">
                   <a:alpha val="100000"/>
@@ -2916,81 +2916,81 @@
           </p:nvSpPr>
           <p:spPr>
             <a:xfrm>
-              <a:off x="1320344" y="3510515"/>
-              <a:ext cx="6949396" cy="1947405"/>
+              <a:off x="1453386" y="3618740"/>
+              <a:ext cx="6804615" cy="1755486"/>
             </a:xfrm>
             <a:custGeom>
               <a:avLst/>
               <a:pathLst>
-                <a:path w="6949396" h="1947405">
+                <a:path w="6804615" h="1755486">
                   <a:moveTo>
-                    <a:pt x="0" y="1947405"/>
+                    <a:pt x="0" y="1755486"/>
                   </a:moveTo>
                   <a:lnTo>
-                    <a:pt x="185317" y="1947405"/>
-                  </a:lnTo>
-                  <a:lnTo>
-                    <a:pt x="185317" y="1484746"/>
-                  </a:lnTo>
-                  <a:lnTo>
-                    <a:pt x="277975" y="1484746"/>
-                  </a:lnTo>
-                  <a:lnTo>
-                    <a:pt x="277975" y="1343855"/>
-                  </a:lnTo>
-                  <a:lnTo>
-                    <a:pt x="370634" y="1343855"/>
-                  </a:lnTo>
-                  <a:lnTo>
-                    <a:pt x="370634" y="1204054"/>
-                  </a:lnTo>
-                  <a:lnTo>
-                    <a:pt x="1482537" y="1204054"/>
-                  </a:lnTo>
-                  <a:lnTo>
-                    <a:pt x="1482537" y="1068076"/>
-                  </a:lnTo>
-                  <a:lnTo>
-                    <a:pt x="1945831" y="1068076"/>
-                  </a:lnTo>
-                  <a:lnTo>
-                    <a:pt x="1945831" y="931039"/>
-                  </a:lnTo>
-                  <a:lnTo>
-                    <a:pt x="2223806" y="931039"/>
-                  </a:lnTo>
-                  <a:lnTo>
-                    <a:pt x="2223806" y="795190"/>
-                  </a:lnTo>
-                  <a:lnTo>
-                    <a:pt x="3057734" y="795190"/>
-                  </a:lnTo>
-                  <a:lnTo>
-                    <a:pt x="3057734" y="518494"/>
-                  </a:lnTo>
-                  <a:lnTo>
-                    <a:pt x="3335710" y="518494"/>
-                  </a:lnTo>
-                  <a:lnTo>
-                    <a:pt x="3335710" y="384116"/>
-                  </a:lnTo>
-                  <a:lnTo>
-                    <a:pt x="6300786" y="384116"/>
-                  </a:lnTo>
-                  <a:lnTo>
-                    <a:pt x="6300786" y="253339"/>
-                  </a:lnTo>
-                  <a:lnTo>
-                    <a:pt x="6578762" y="253339"/>
-                  </a:lnTo>
-                  <a:lnTo>
-                    <a:pt x="6578762" y="125858"/>
-                  </a:lnTo>
-                  <a:lnTo>
-                    <a:pt x="6949396" y="125858"/>
-                  </a:lnTo>
-                  <a:lnTo>
-                    <a:pt x="6949396" y="0"/>
+                    <a:pt x="181456" y="1755486"/>
+                  </a:lnTo>
+                  <a:lnTo>
+                    <a:pt x="181456" y="1338423"/>
+                  </a:lnTo>
+                  <a:lnTo>
+                    <a:pt x="272184" y="1338423"/>
+                  </a:lnTo>
+                  <a:lnTo>
+                    <a:pt x="272184" y="1211417"/>
+                  </a:lnTo>
+                  <a:lnTo>
+                    <a:pt x="362912" y="1211417"/>
+                  </a:lnTo>
+                  <a:lnTo>
+                    <a:pt x="362912" y="1085394"/>
+                  </a:lnTo>
+                  <a:lnTo>
+                    <a:pt x="1451651" y="1085394"/>
+                  </a:lnTo>
+                  <a:lnTo>
+                    <a:pt x="1451651" y="962817"/>
+                  </a:lnTo>
+                  <a:lnTo>
+                    <a:pt x="1905292" y="962817"/>
+                  </a:lnTo>
+                  <a:lnTo>
+                    <a:pt x="1905292" y="839285"/>
+                  </a:lnTo>
+                  <a:lnTo>
+                    <a:pt x="2177476" y="839285"/>
+                  </a:lnTo>
+                  <a:lnTo>
+                    <a:pt x="2177476" y="716823"/>
+                  </a:lnTo>
+                  <a:lnTo>
+                    <a:pt x="2994030" y="716823"/>
+                  </a:lnTo>
+                  <a:lnTo>
+                    <a:pt x="2994030" y="467396"/>
+                  </a:lnTo>
+                  <a:lnTo>
+                    <a:pt x="3266215" y="467396"/>
+                  </a:lnTo>
+                  <a:lnTo>
+                    <a:pt x="3266215" y="346261"/>
+                  </a:lnTo>
+                  <a:lnTo>
+                    <a:pt x="6169517" y="346261"/>
+                  </a:lnTo>
+                  <a:lnTo>
+                    <a:pt x="6169517" y="228372"/>
+                  </a:lnTo>
+                  <a:lnTo>
+                    <a:pt x="6441702" y="228372"/>
+                  </a:lnTo>
+                  <a:lnTo>
+                    <a:pt x="6441702" y="113455"/>
+                  </a:lnTo>
+                  <a:lnTo>
+                    <a:pt x="6804615" y="113455"/>
+                  </a:lnTo>
+                  <a:lnTo>
+                    <a:pt x="6804615" y="0"/>
                   </a:lnTo>
                 </a:path>
               </a:pathLst>
@@ -3019,81 +3019,81 @@
           </p:nvSpPr>
           <p:spPr>
             <a:xfrm>
-              <a:off x="1320344" y="2861938"/>
-              <a:ext cx="6949396" cy="2544628"/>
+              <a:off x="1453386" y="3034080"/>
+              <a:ext cx="6804615" cy="2293853"/>
             </a:xfrm>
             <a:custGeom>
               <a:avLst/>
               <a:pathLst>
-                <a:path w="6949396" h="2544628">
+                <a:path w="6804615" h="2293853">
                   <a:moveTo>
-                    <a:pt x="0" y="2544628"/>
+                    <a:pt x="0" y="2293853"/>
                   </a:moveTo>
                   <a:lnTo>
-                    <a:pt x="185317" y="2544628"/>
-                  </a:lnTo>
-                  <a:lnTo>
-                    <a:pt x="185317" y="1908866"/>
-                  </a:lnTo>
-                  <a:lnTo>
-                    <a:pt x="277975" y="1908866"/>
-                  </a:lnTo>
-                  <a:lnTo>
-                    <a:pt x="277975" y="1720542"/>
-                  </a:lnTo>
-                  <a:lnTo>
-                    <a:pt x="370634" y="1720542"/>
-                  </a:lnTo>
-                  <a:lnTo>
-                    <a:pt x="370634" y="1535617"/>
-                  </a:lnTo>
-                  <a:lnTo>
-                    <a:pt x="1482537" y="1535617"/>
-                  </a:lnTo>
-                  <a:lnTo>
-                    <a:pt x="1482537" y="1357397"/>
-                  </a:lnTo>
-                  <a:lnTo>
-                    <a:pt x="1945831" y="1357397"/>
-                  </a:lnTo>
-                  <a:lnTo>
-                    <a:pt x="1945831" y="1179264"/>
-                  </a:lnTo>
-                  <a:lnTo>
-                    <a:pt x="2223806" y="1179264"/>
-                  </a:lnTo>
-                  <a:lnTo>
-                    <a:pt x="2223806" y="1003999"/>
-                  </a:lnTo>
-                  <a:lnTo>
-                    <a:pt x="3057734" y="1003999"/>
-                  </a:lnTo>
-                  <a:lnTo>
-                    <a:pt x="3057734" y="650666"/>
-                  </a:lnTo>
-                  <a:lnTo>
-                    <a:pt x="3335710" y="650666"/>
-                  </a:lnTo>
-                  <a:lnTo>
-                    <a:pt x="3335710" y="480675"/>
-                  </a:lnTo>
-                  <a:lnTo>
-                    <a:pt x="6300786" y="480675"/>
-                  </a:lnTo>
-                  <a:lnTo>
-                    <a:pt x="6300786" y="316176"/>
-                  </a:lnTo>
-                  <a:lnTo>
-                    <a:pt x="6578762" y="316176"/>
-                  </a:lnTo>
-                  <a:lnTo>
-                    <a:pt x="6578762" y="156675"/>
-                  </a:lnTo>
-                  <a:lnTo>
-                    <a:pt x="6949396" y="156675"/>
-                  </a:lnTo>
-                  <a:lnTo>
-                    <a:pt x="6949396" y="0"/>
+                    <a:pt x="181456" y="2293853"/>
+                  </a:lnTo>
+                  <a:lnTo>
+                    <a:pt x="181456" y="1720746"/>
+                  </a:lnTo>
+                  <a:lnTo>
+                    <a:pt x="272184" y="1720746"/>
+                  </a:lnTo>
+                  <a:lnTo>
+                    <a:pt x="272184" y="1550981"/>
+                  </a:lnTo>
+                  <a:lnTo>
+                    <a:pt x="362912" y="1550981"/>
+                  </a:lnTo>
+                  <a:lnTo>
+                    <a:pt x="362912" y="1384280"/>
+                  </a:lnTo>
+                  <a:lnTo>
+                    <a:pt x="1451651" y="1384280"/>
+                  </a:lnTo>
+                  <a:lnTo>
+                    <a:pt x="1451651" y="1223625"/>
+                  </a:lnTo>
+                  <a:lnTo>
+                    <a:pt x="1905292" y="1223625"/>
+                  </a:lnTo>
+                  <a:lnTo>
+                    <a:pt x="1905292" y="1063047"/>
+                  </a:lnTo>
+                  <a:lnTo>
+                    <a:pt x="2177476" y="1063047"/>
+                  </a:lnTo>
+                  <a:lnTo>
+                    <a:pt x="2177476" y="905054"/>
+                  </a:lnTo>
+                  <a:lnTo>
+                    <a:pt x="2994030" y="905054"/>
+                  </a:lnTo>
+                  <a:lnTo>
+                    <a:pt x="2994030" y="586542"/>
+                  </a:lnTo>
+                  <a:lnTo>
+                    <a:pt x="3266215" y="586542"/>
+                  </a:lnTo>
+                  <a:lnTo>
+                    <a:pt x="3266215" y="433304"/>
+                  </a:lnTo>
+                  <a:lnTo>
+                    <a:pt x="6169517" y="433304"/>
+                  </a:lnTo>
+                  <a:lnTo>
+                    <a:pt x="6169517" y="285017"/>
+                  </a:lnTo>
+                  <a:lnTo>
+                    <a:pt x="6441702" y="285017"/>
+                  </a:lnTo>
+                  <a:lnTo>
+                    <a:pt x="6441702" y="141235"/>
+                  </a:lnTo>
+                  <a:lnTo>
+                    <a:pt x="6804615" y="141235"/>
+                  </a:lnTo>
+                  <a:lnTo>
+                    <a:pt x="6804615" y="0"/>
                   </a:lnTo>
                 </a:path>
               </a:pathLst>
@@ -3122,8 +3122,8 @@
           </p:nvSpPr>
           <p:spPr>
             <a:xfrm>
-              <a:off x="692708" y="5540371"/>
-              <a:ext cx="217535" cy="80101"/>
+              <a:off x="756929" y="5433678"/>
+              <a:ext cx="276514" cy="101955"/>
             </a:xfrm>
             <a:prstGeom prst="rect">
               <a:avLst/>
@@ -3136,7 +3136,7 @@
             <a:p>
               <a:pPr algn="l" marL="0" marR="0" indent="0">
                 <a:lnSpc>
-                  <a:spcPts val="880"/>
+                  <a:spcPts val="1120"/>
                 </a:lnSpc>
                 <a:spcBef>
                   <a:spcPts val="0"/>
@@ -3146,7 +3146,7 @@
                 </a:spcAft>
               </a:pPr>
               <a:r>
-                <a:rPr sz="880">
+                <a:rPr sz="1120">
                   <a:solidFill>
                     <a:srgbClr val="4D4D4D">
                       <a:alpha val="100000"/>
@@ -3168,8 +3168,8 @@
           </p:nvSpPr>
           <p:spPr>
             <a:xfrm>
-              <a:off x="692708" y="4635477"/>
-              <a:ext cx="217535" cy="80101"/>
+              <a:off x="756929" y="4617961"/>
+              <a:ext cx="276514" cy="101955"/>
             </a:xfrm>
             <a:prstGeom prst="rect">
               <a:avLst/>
@@ -3182,7 +3182,7 @@
             <a:p>
               <a:pPr algn="l" marL="0" marR="0" indent="0">
                 <a:lnSpc>
-                  <a:spcPts val="880"/>
+                  <a:spcPts val="1120"/>
                 </a:lnSpc>
                 <a:spcBef>
                   <a:spcPts val="0"/>
@@ -3192,7 +3192,7 @@
                 </a:spcAft>
               </a:pPr>
               <a:r>
-                <a:rPr sz="880">
+                <a:rPr sz="1120">
                   <a:solidFill>
                     <a:srgbClr val="4D4D4D">
                       <a:alpha val="100000"/>
@@ -3214,8 +3214,8 @@
           </p:nvSpPr>
           <p:spPr>
             <a:xfrm>
-              <a:off x="692708" y="3730582"/>
-              <a:ext cx="217535" cy="80101"/>
+              <a:off x="756929" y="3802245"/>
+              <a:ext cx="276514" cy="101955"/>
             </a:xfrm>
             <a:prstGeom prst="rect">
               <a:avLst/>
@@ -3228,7 +3228,7 @@
             <a:p>
               <a:pPr algn="l" marL="0" marR="0" indent="0">
                 <a:lnSpc>
-                  <a:spcPts val="880"/>
+                  <a:spcPts val="1120"/>
                 </a:lnSpc>
                 <a:spcBef>
                   <a:spcPts val="0"/>
@@ -3238,7 +3238,7 @@
                 </a:spcAft>
               </a:pPr>
               <a:r>
-                <a:rPr sz="880">
+                <a:rPr sz="1120">
                   <a:solidFill>
                     <a:srgbClr val="4D4D4D">
                       <a:alpha val="100000"/>
@@ -3260,8 +3260,8 @@
           </p:nvSpPr>
           <p:spPr>
             <a:xfrm>
-              <a:off x="692708" y="2825688"/>
-              <a:ext cx="217535" cy="80101"/>
+              <a:off x="756929" y="2986529"/>
+              <a:ext cx="276514" cy="101955"/>
             </a:xfrm>
             <a:prstGeom prst="rect">
               <a:avLst/>
@@ -3274,7 +3274,7 @@
             <a:p>
               <a:pPr algn="l" marL="0" marR="0" indent="0">
                 <a:lnSpc>
-                  <a:spcPts val="880"/>
+                  <a:spcPts val="1120"/>
                 </a:lnSpc>
                 <a:spcBef>
                   <a:spcPts val="0"/>
@@ -3284,7 +3284,7 @@
                 </a:spcAft>
               </a:pPr>
               <a:r>
-                <a:rPr sz="880">
+                <a:rPr sz="1120">
                   <a:solidFill>
                     <a:srgbClr val="4D4D4D">
                       <a:alpha val="100000"/>
@@ -3306,8 +3306,8 @@
           </p:nvSpPr>
           <p:spPr>
             <a:xfrm>
-              <a:off x="2277409" y="5785772"/>
-              <a:ext cx="124358" cy="80101"/>
+              <a:off x="2372392" y="5693022"/>
+              <a:ext cx="158008" cy="101955"/>
             </a:xfrm>
             <a:prstGeom prst="rect">
               <a:avLst/>
@@ -3320,7 +3320,7 @@
             <a:p>
               <a:pPr algn="l" marL="0" marR="0" indent="0">
                 <a:lnSpc>
-                  <a:spcPts val="880"/>
+                  <a:spcPts val="1120"/>
                 </a:lnSpc>
                 <a:spcBef>
                   <a:spcPts val="0"/>
@@ -3330,7 +3330,7 @@
                 </a:spcAft>
               </a:pPr>
               <a:r>
-                <a:rPr sz="880">
+                <a:rPr sz="1120">
                   <a:solidFill>
                     <a:srgbClr val="4D4D4D">
                       <a:alpha val="100000"/>
@@ -3352,8 +3352,8 @@
           </p:nvSpPr>
           <p:spPr>
             <a:xfrm>
-              <a:off x="4130582" y="5785772"/>
-              <a:ext cx="124358" cy="80101"/>
+              <a:off x="4186956" y="5693022"/>
+              <a:ext cx="158008" cy="101955"/>
             </a:xfrm>
             <a:prstGeom prst="rect">
               <a:avLst/>
@@ -3366,7 +3366,7 @@
             <a:p>
               <a:pPr algn="l" marL="0" marR="0" indent="0">
                 <a:lnSpc>
-                  <a:spcPts val="880"/>
+                  <a:spcPts val="1120"/>
                 </a:lnSpc>
                 <a:spcBef>
                   <a:spcPts val="0"/>
@@ -3376,7 +3376,7 @@
                 </a:spcAft>
               </a:pPr>
               <a:r>
-                <a:rPr sz="880">
+                <a:rPr sz="1120">
                   <a:solidFill>
                     <a:srgbClr val="4D4D4D">
                       <a:alpha val="100000"/>
@@ -3398,8 +3398,8 @@
           </p:nvSpPr>
           <p:spPr>
             <a:xfrm>
-              <a:off x="5983754" y="5785772"/>
-              <a:ext cx="124358" cy="80101"/>
+              <a:off x="6001520" y="5693022"/>
+              <a:ext cx="158008" cy="101955"/>
             </a:xfrm>
             <a:prstGeom prst="rect">
               <a:avLst/>
@@ -3412,7 +3412,7 @@
             <a:p>
               <a:pPr algn="l" marL="0" marR="0" indent="0">
                 <a:lnSpc>
-                  <a:spcPts val="880"/>
+                  <a:spcPts val="1120"/>
                 </a:lnSpc>
                 <a:spcBef>
                   <a:spcPts val="0"/>
@@ -3422,7 +3422,7 @@
                 </a:spcAft>
               </a:pPr>
               <a:r>
-                <a:rPr sz="880">
+                <a:rPr sz="1120">
                   <a:solidFill>
                     <a:srgbClr val="4D4D4D">
                       <a:alpha val="100000"/>
@@ -3444,8 +3444,8 @@
           </p:nvSpPr>
           <p:spPr>
             <a:xfrm>
-              <a:off x="7836927" y="5785772"/>
-              <a:ext cx="124358" cy="80101"/>
+              <a:off x="7816084" y="5693022"/>
+              <a:ext cx="158008" cy="101955"/>
             </a:xfrm>
             <a:prstGeom prst="rect">
               <a:avLst/>
@@ -3458,7 +3458,7 @@
             <a:p>
               <a:pPr algn="l" marL="0" marR="0" indent="0">
                 <a:lnSpc>
-                  <a:spcPts val="880"/>
+                  <a:spcPts val="1120"/>
                 </a:lnSpc>
                 <a:spcBef>
                   <a:spcPts val="0"/>
@@ -3468,7 +3468,7 @@
                 </a:spcAft>
               </a:pPr>
               <a:r>
-                <a:rPr sz="880">
+                <a:rPr sz="1120">
                   <a:solidFill>
                     <a:srgbClr val="4D4D4D">
                       <a:alpha val="100000"/>
@@ -3490,8 +3490,8 @@
           </p:nvSpPr>
           <p:spPr>
             <a:xfrm>
-              <a:off x="4197162" y="5925448"/>
-              <a:ext cx="1195760" cy="100218"/>
+              <a:off x="4094958" y="5870717"/>
+              <a:ext cx="1521470" cy="127558"/>
             </a:xfrm>
             <a:prstGeom prst="rect">
               <a:avLst/>
@@ -3504,7 +3504,7 @@
             <a:p>
               <a:pPr algn="l" marL="0" marR="0" indent="0">
                 <a:lnSpc>
-                  <a:spcPts val="1100"/>
+                  <a:spcPts val="1400"/>
                 </a:lnSpc>
                 <a:spcBef>
                   <a:spcPts val="0"/>
@@ -3514,7 +3514,7 @@
                 </a:spcAft>
               </a:pPr>
               <a:r>
-                <a:rPr sz="1100">
+                <a:rPr sz="1400">
                   <a:solidFill>
                     <a:srgbClr val="000000">
                       <a:alpha val="100000"/>
@@ -3536,8 +3536,8 @@
           </p:nvSpPr>
           <p:spPr>
             <a:xfrm rot="-5400000">
-              <a:off x="-87047" y="4103109"/>
-              <a:ext cx="1327891" cy="100218"/>
+              <a:off x="-235221" y="4134324"/>
+              <a:ext cx="1689536" cy="127558"/>
             </a:xfrm>
             <a:prstGeom prst="rect">
               <a:avLst/>
@@ -3550,7 +3550,7 @@
             <a:p>
               <a:pPr algn="l" marL="0" marR="0" indent="0">
                 <a:lnSpc>
-                  <a:spcPts val="1100"/>
+                  <a:spcPts val="1400"/>
                 </a:lnSpc>
                 <a:spcBef>
                   <a:spcPts val="0"/>
@@ -3560,7 +3560,7 @@
                 </a:spcAft>
               </a:pPr>
               <a:r>
-                <a:rPr sz="1100">
+                <a:rPr sz="1400">
                   <a:solidFill>
                     <a:srgbClr val="000000">
                       <a:alpha val="100000"/>
@@ -3582,7 +3582,7 @@
           </p:nvSpPr>
           <p:spPr>
             <a:xfrm>
-              <a:off x="3578565" y="2264798"/>
+              <a:off x="3362626" y="2407465"/>
               <a:ext cx="175564" cy="0"/>
             </a:xfrm>
             <a:custGeom>
@@ -3622,7 +3622,7 @@
           </p:nvSpPr>
           <p:spPr>
             <a:xfrm>
-              <a:off x="4819138" y="2264798"/>
+              <a:off x="4880455" y="2407465"/>
               <a:ext cx="175564" cy="0"/>
             </a:xfrm>
             <a:custGeom>
@@ -3662,8 +3662,8 @@
           </p:nvSpPr>
           <p:spPr>
             <a:xfrm>
-              <a:off x="3845665" y="2224748"/>
-              <a:ext cx="881938" cy="80101"/>
+              <a:off x="3648704" y="2356487"/>
+              <a:ext cx="1121237" cy="101955"/>
             </a:xfrm>
             <a:prstGeom prst="rect">
               <a:avLst/>
@@ -3676,7 +3676,7 @@
             <a:p>
               <a:pPr algn="l" marL="0" marR="0" indent="0">
                 <a:lnSpc>
-                  <a:spcPts val="880"/>
+                  <a:spcPts val="1120"/>
                 </a:lnSpc>
                 <a:spcBef>
                   <a:spcPts val="0"/>
@@ -3686,7 +3686,7 @@
                 </a:spcAft>
               </a:pPr>
               <a:r>
-                <a:rPr sz="880">
+                <a:rPr sz="1120">
                   <a:solidFill>
                     <a:srgbClr val="000000">
                       <a:alpha val="100000"/>
@@ -3708,8 +3708,8 @@
           </p:nvSpPr>
           <p:spPr>
             <a:xfrm>
-              <a:off x="5086238" y="2224748"/>
-              <a:ext cx="947226" cy="80101"/>
+              <a:off x="5166533" y="2356487"/>
+              <a:ext cx="1204173" cy="101955"/>
             </a:xfrm>
             <a:prstGeom prst="rect">
               <a:avLst/>
@@ -3722,7 +3722,7 @@
             <a:p>
               <a:pPr algn="l" marL="0" marR="0" indent="0">
                 <a:lnSpc>
-                  <a:spcPts val="880"/>
+                  <a:spcPts val="1120"/>
                 </a:lnSpc>
                 <a:spcBef>
                   <a:spcPts val="0"/>
@@ -3732,7 +3732,7 @@
                 </a:spcAft>
               </a:pPr>
               <a:r>
-                <a:rPr sz="880">
+                <a:rPr sz="1120">
                   <a:solidFill>
                     <a:srgbClr val="000000">
                       <a:alpha val="100000"/>
@@ -3754,8 +3754,8 @@
           </p:nvSpPr>
           <p:spPr>
             <a:xfrm>
-              <a:off x="972874" y="1896563"/>
-              <a:ext cx="3913906" cy="91165"/>
+              <a:off x="1113155" y="1977589"/>
+              <a:ext cx="4697455" cy="109362"/>
             </a:xfrm>
             <a:prstGeom prst="rect">
               <a:avLst/>
@@ -3768,7 +3768,7 @@
             <a:p>
               <a:pPr algn="l" marL="0" marR="0" indent="0">
                 <a:lnSpc>
-                  <a:spcPts val="1000"/>
+                  <a:spcPts val="1200"/>
                 </a:lnSpc>
                 <a:spcBef>
                   <a:spcPts val="0"/>
@@ -3778,7 +3778,7 @@
                 </a:spcAft>
               </a:pPr>
               <a:r>
-                <a:rPr sz="1000">
+                <a:rPr sz="1200">
                   <a:solidFill>
                     <a:srgbClr val="404040">
                       <a:alpha val="100000"/>
@@ -3800,8 +3800,8 @@
           </p:nvSpPr>
           <p:spPr>
             <a:xfrm>
-              <a:off x="972874" y="1669789"/>
-              <a:ext cx="1806397" cy="120152"/>
+              <a:off x="1113155" y="1688767"/>
+              <a:ext cx="2299716" cy="153070"/>
             </a:xfrm>
             <a:prstGeom prst="rect">
               <a:avLst/>
@@ -3814,7 +3814,7 @@
             <a:p>
               <a:pPr algn="l" marL="0" marR="0" indent="0">
                 <a:lnSpc>
-                  <a:spcPts val="1320"/>
+                  <a:spcPts val="1680"/>
                 </a:lnSpc>
                 <a:spcBef>
                   <a:spcPts val="0"/>
@@ -3824,7 +3824,7 @@
                 </a:spcAft>
               </a:pPr>
               <a:r>
-                <a:rPr sz="1320">
+                <a:rPr sz="1680">
                   <a:solidFill>
                     <a:srgbClr val="000000">
                       <a:alpha val="100000"/>
